--- a/decks/day1/module-5-agent-stack.pptx
+++ b/decks/day1/module-5-agent-stack.pptx
@@ -2058,7 +2058,7 @@
             <a:off x="365760" y="4343400"/>
             <a:ext cx="8412480" cy="457200"/>
           </a:xfrm>
-          <a:prstGeom prst="1">
+          <a:prstGeom prst="rect">
             <a:avLst/>
           </a:prstGeom>
           <a:solidFill>

--- a/decks/day1/module-5-agent-stack.pptx
+++ b/decks/day1/module-5-agent-stack.pptx
@@ -2114,7 +2114,7 @@
                 <a:ea typeface="Calibri" pitchFamily="34" charset="-122"/>
                 <a:cs typeface="Calibri" pitchFamily="34" charset="-120"/>
               </a:rPr>
-              <a:t>Module 6 zooms into Layer 2 (Runtime) — the two agent hosting styles you can pick.</a:t>
+              <a:t>Module 6 zooms into Layer 2 (Runtime) — the three ways to run an agent with Foundry.</a:t>
             </a:r>
             <a:endParaRPr lang="en-US" sz="1600" dirty="0"/>
           </a:p>
@@ -2308,7 +2308,7 @@
                 <a:ea typeface="Calibri" pitchFamily="34" charset="-122"/>
                 <a:cs typeface="Calibri" pitchFamily="34" charset="-120"/>
               </a:rPr>
-              <a:t>Runtime — where the agent lives (client-side vs. Foundry-hosted)</a:t>
+              <a:t>Runtime — where the agent runs (Prompt agent, Hosted agent, or your own code calling the Responses API)</a:t>
             </a:r>
             <a:endParaRPr lang="en-US" sz="1800" dirty="0"/>
           </a:p>
@@ -2915,7 +2915,7 @@
                 <a:ea typeface="Calibri" pitchFamily="34" charset="-122"/>
                 <a:cs typeface="Calibri" pitchFamily="34" charset="-120"/>
               </a:rPr>
-              <a:t>Client-side — Agent + FoundryChatClient in your app; in-process thread state</a:t>
+              <a:t>Prompt agent — portal- or SDK-authored, no code, Foundry runs it</a:t>
             </a:r>
             <a:endParaRPr lang="en-US" sz="1500" dirty="0"/>
           </a:p>
@@ -2936,7 +2936,28 @@
                 <a:ea typeface="Calibri" pitchFamily="34" charset="-122"/>
                 <a:cs typeface="Calibri" pitchFamily="34" charset="-120"/>
               </a:rPr>
-              <a:t>Foundry-hosted — a PromptAgent or HostedAgent, connected from MAF via FoundryAgent; server-managed state</a:t>
+              <a:t>Hosted agent — your code, packaged as a container, Foundry runs the container</a:t>
+            </a:r>
+            <a:endParaRPr lang="en-US" sz="1500" dirty="0"/>
+          </a:p>
+          <a:p>
+            <a:pPr marL="342900" indent="-342900">
+              <a:spcAft>
+                <a:spcPts val="600"/>
+              </a:spcAft>
+              <a:buSzPct val="100000"/>
+              <a:buChar char="•"/>
+            </a:pPr>
+            <a:r>
+              <a:rPr lang="en-US" sz="1500" dirty="0">
+                <a:solidFill>
+                  <a:srgbClr val="212121"/>
+                </a:solidFill>
+                <a:latin typeface="Calibri" pitchFamily="34" charset="0"/>
+                <a:ea typeface="Calibri" pitchFamily="34" charset="-122"/>
+                <a:cs typeface="Calibri" pitchFamily="34" charset="-120"/>
+              </a:rPr>
+              <a:t>Your own code calling the Responses API — your process runs your code and calls Foundry for models and tools</a:t>
             </a:r>
             <a:endParaRPr lang="en-US" sz="1500" dirty="0"/>
           </a:p>

--- a/decks/day1/module-5-agent-stack.pptx
+++ b/decks/day1/module-5-agent-stack.pptx
@@ -511,7 +511,11 @@
           <a:p>
             <a:r>
               <a:rPr lang="en-US" dirty="0"/>
-              <a:t>The 'compass' module. If they leave with only one thing from Day 1, it should be this five-layer model.</a:t>
+              <a:t>• This is the 'compass' module of Day 1
+• If attendees leave with only ONE thing from Day 1, it should be the five layers
+• Every day this week refers back — repeat that promise
+• Ask attendees to write down the five words on paper
+• Time budget: 35 min — half the module is Layer 1–5 slides, half is 'where each day lives' + 'why this matters'</a:t>
             </a:r>
             <a:endParaRPr lang="en-US" dirty="0"/>
           </a:p>
@@ -687,7 +691,12 @@
           <a:p>
             <a:r>
               <a:rPr lang="en-US" dirty="0"/>
-              <a:t>Say the five words twice. Ask attendees to write them down. Every day this week refers back.</a:t>
+              <a:t>• Say the five words twice, slowly:
+•   Model, Runtime, Actions, Knowledge, Ops
+• Ask attendees to write them down
+• Reinforce: 'every day this week fits into these five layers'
+• Reinforce: 'every agent you build fits into these five layers'
+• Every subsequent slide in this module drills into one layer</a:t>
             </a:r>
             <a:endParaRPr lang="en-US" dirty="0"/>
           </a:p>
@@ -775,7 +784,11 @@
           <a:p>
             <a:r>
               <a:rPr lang="en-US" dirty="0"/>
-              <a:t>Keep it short — attendees have already been through the portal on this.</a:t>
+              <a:t>• Keep this slide short — attendees already saw model deployments in Module 2
+• Three decisions at this layer:
+•   which model, what capacity, which region
+• Day 5 revisits: model routing (small first, escalate on low confidence)
+• One tip: name deployments by (model, role) not just model</a:t>
             </a:r>
             <a:endParaRPr lang="en-US" dirty="0"/>
           </a:p>
@@ -863,7 +876,12 @@
           <a:p>
             <a:r>
               <a:rPr lang="en-US" dirty="0"/>
-              <a:t>Tee up Module 6.</a:t>
+              <a:t>• Tee up Module 6 — three ways to run an agent
+• Path A: Prompt agent — Foundry runs it, no code
+• Path B: Hosted agent — your code, Foundry runs the container
+• Path C: your own code calling the Responses API
+• Don't teach them now — Module 6 does that in 35 min
+• Just plant the flag: 'this is a real decision point'</a:t>
             </a:r>
             <a:endParaRPr lang="en-US" dirty="0"/>
           </a:p>
@@ -951,7 +969,12 @@
           <a:p>
             <a:r>
               <a:rPr lang="en-US" dirty="0"/>
-              <a:t>Actions = capability. Knowledge (next slide) = memory. Keep them distinct.</a:t>
+              <a:t>• Actions = capability = what the agent can DO
+• Knowledge (next slide) = grounding = what the agent KNOWS
+• Keep these two concepts distinct — attendees conflate them
+• Three sources of actions: function tools, Toolbox, MCP
+• Day 2 covers function tools + Toolbox; Day 3 covers MCP end-to-end
+• When something breaks: 'is this an Actions bug or a Knowledge bug?'</a:t>
             </a:r>
             <a:endParaRPr lang="en-US" dirty="0"/>
           </a:p>
@@ -1039,7 +1062,12 @@
           <a:p>
             <a:r>
               <a:rPr lang="en-US" dirty="0"/>
-              <a:t>IQ = the easy path. Custom RAG = when you need control. Not a binary — mix.</a:t>
+              <a:t>• Knowledge = grounding = what the agent knows
+• Foundry IQ = the easy path — unified retrieval across enterprise sources
+• Custom RAG = when you need control IQ doesn't give you yet
+• Not a binary — mix in a real system
+• Day 2 is IQ's deep dive with a hands-on comparison
+• Rule: reach for IQ first, drop to custom RAG when you have a specific reason</a:t>
             </a:r>
             <a:endParaRPr lang="en-US" dirty="0"/>
           </a:p>
@@ -1127,7 +1155,12 @@
           <a:p>
             <a:r>
               <a:rPr lang="en-US" dirty="0"/>
-              <a:t>Emphasize: eval is not a Day-5 topic. It appears every day.</a:t>
+              <a:t>• Ops = the unglamorous layer that makes agents production-worthy
+• Five sub-layers: identity, tracing, evaluation, cost/latency, deployment
+• Emphasize: evaluation is NOT a Day-5 topic
+• Eval appears every day this week (Days 2, 3, 4, 5)
+• Day 4 is the eval anchor module
+• Day 5 covers the rest of Ops (identity, tracing, cost, deployment)</a:t>
             </a:r>
             <a:endParaRPr lang="en-US" dirty="0"/>
           </a:p>
@@ -1215,7 +1248,12 @@
           <a:p>
             <a:r>
               <a:rPr lang="en-US" dirty="0"/>
-              <a:t>Nothing in the workshop lives outside these five columns. If something feels orphaned, tell us.</a:t>
+              <a:t>• Every topic in the workshop fits into these five columns
+• If a topic feels orphaned to attendees, ask them to flag it
+• Walk the table row by row (~15 seconds per row)
+• Point out: 'eval' appears in every row from Day 2 onward
+• Day 4 = the multi-agent + eval anchor day
+• Day 5 = the Ops-heavy day</a:t>
             </a:r>
             <a:endParaRPr lang="en-US" dirty="0"/>
           </a:p>
@@ -1303,7 +1341,12 @@
           <a:p>
             <a:r>
               <a:rPr lang="en-US" dirty="0"/>
-              <a:t>This is a soft-skills slide disguised as an architecture slide. Attendees will use it to argue for budget and roadmap items.</a:t>
+              <a:t>• This is a soft-skills slide disguised as an architecture slide
+• The five layers give attendees vocabulary to talk to product / ops / security
+• 'The agent isn't grounded' = Knowledge problem, not Model problem
+• 'Adding an MCP tool' = Actions + Ops concern, not Model concern
+• Attendees will use this to argue for budget and roadmap items later
+• Encourage them to bring the vocabulary back to Publix</a:t>
             </a:r>
             <a:endParaRPr lang="en-US" dirty="0"/>
           </a:p>

--- a/decks/day1/module-5-agent-stack.pptx
+++ b/decks/day1/module-5-agent-stack.pptx
@@ -3837,7 +3837,7 @@
                 <a:ea typeface="Calibri" pitchFamily="34" charset="-122"/>
                 <a:cs typeface="Calibri" pitchFamily="34" charset="-120"/>
               </a:rPr>
-              <a:t>Tracing — OpenTelemetry, Foundry tracing, App Insights</a:t>
+              <a:t>Tracing — OTel spans of every model call, tool invocation, and decision; view in the Foundry portal or ship to App Insights</a:t>
             </a:r>
             <a:endParaRPr lang="en-US" sz="1500" dirty="0"/>
           </a:p>

--- a/decks/day1/module-5-agent-stack.pptx
+++ b/decks/day1/module-5-agent-stack.pptx
@@ -1346,7 +1346,7 @@
 • 'The agent isn't grounded' = Knowledge problem, not Model problem
 • 'Adding an MCP tool' = Actions + Ops concern, not Model concern
 • Attendees will use this to argue for budget and roadmap items later
-• Encourage them to bring the vocabulary back to Publix</a:t>
+• Encourage them to bring the vocabulary back to their teams</a:t>
             </a:r>
             <a:endParaRPr lang="en-US" dirty="0"/>
           </a:p>
@@ -6817,7 +6817,7 @@
                 <a:ea typeface="Calibri" pitchFamily="34" charset="-122"/>
                 <a:cs typeface="Calibri" pitchFamily="34" charset="-120"/>
               </a:rPr>
-              <a:t>Bring this back to Publix as a shared vocabulary.</a:t>
+              <a:t>Bring this back to your team as a shared vocabulary.</a:t>
             </a:r>
             <a:endParaRPr lang="en-US" sz="1400" dirty="0"/>
           </a:p>

--- a/decks/day1/module-5-agent-stack.pptx
+++ b/decks/day1/module-5-agent-stack.pptx
@@ -15,9 +15,10 @@
     <p:sldId id="263" r:id="rId9"/>
     <p:sldId id="264" r:id="rId10"/>
     <p:sldId id="265" r:id="rId11"/>
+    <p:sldId id="266" r:id="rId12"/>
   </p:sldIdLst>
   <p:notesMasterIdLst>
-    <p:notesMasterId r:id="rId12"/>
+    <p:notesMasterId r:id="rId13"/>
   </p:notesMasterIdLst>
   <p:sldSz cx="9144000" cy="5143500"/>
   <p:notesSz cx="5143500" cy="9144000"/>
@@ -513,7 +514,7 @@
               <a:rPr lang="en-US" dirty="0"/>
               <a:t>• This is the 'compass' module of Day 1
 • If attendees leave with only ONE thing from Day 1, it should be the five layers
-• Every day this week refers back — repeat that promise
+• The rest of the workshop refers back — repeat that promise
 • Ask attendees to write down the five words on paper
 • Time budget: 35 min — half the module is Layer 1–5 slides, half is 'where each day lives' + 'why this matters'</a:t>
             </a:r>
@@ -603,7 +604,12 @@
           <a:p>
             <a:r>
               <a:rPr lang="en-US" dirty="0"/>
-              <a:t>Ask two attendees to name the five layers out loud. Cheap check for retention.</a:t>
+              <a:t>• This is a soft-skills slide disguised as an architecture slide
+• The five layers give attendees vocabulary to talk to product / ops / security
+• 'The agent isn't grounded' = Knowledge problem, not Model problem
+• 'Adding an MCP tool' = Actions + Ops concern, not Model concern
+• Attendees will use this to argue for budget and roadmap items later
+• Encourage them to bring the vocabulary back to their teams</a:t>
             </a:r>
             <a:endParaRPr lang="en-US" dirty="0"/>
           </a:p>
@@ -627,6 +633,94 @@
             <a:fld id="{F7021451-1387-4CA6-816F-3879F97B5CBC}" type="slidenum">
               <a:rPr lang="en-US"/>
               <a:t>10</a:t>
+            </a:fld>
+            <a:endParaRPr lang="en-US"/>
+          </a:p>
+        </p:txBody>
+      </p:sp>
+    </p:spTree>
+    <p:extLst>
+      <p:ext uri="{BB962C8B-B14F-4D97-AF65-F5344CB8AC3E}">
+        <p14:creationId xmlns:p14="http://schemas.microsoft.com/office/powerpoint/2010/main" val="1024086991"/>
+      </p:ext>
+    </p:extLst>
+  </p:cSld>
+  <p:clrMapOvr>
+    <a:masterClrMapping/>
+  </p:clrMapOvr>
+</p:notes>
+</file>
+
+<file path=ppt/notesSlides/notesSlide11.xml><?xml version="1.0" encoding="utf-8"?>
+<p:notes xmlns:a="http://schemas.openxmlformats.org/drawingml/2006/main" xmlns:r="http://schemas.openxmlformats.org/officeDocument/2006/relationships" xmlns:p="http://schemas.openxmlformats.org/presentationml/2006/main">
+  <p:cSld>
+    <p:spTree>
+      <p:nvGrpSpPr>
+        <p:cNvPr id="1" name=""/>
+        <p:cNvGrpSpPr/>
+        <p:nvPr/>
+      </p:nvGrpSpPr>
+      <p:grpSpPr>
+        <a:xfrm>
+          <a:off x="0" y="0"/>
+          <a:ext cx="0" cy="0"/>
+          <a:chOff x="0" y="0"/>
+          <a:chExt cx="0" cy="0"/>
+        </a:xfrm>
+      </p:grpSpPr>
+      <p:sp>
+        <p:nvSpPr>
+          <p:cNvPr id="2" name="Slide Image Placeholder 1"/>
+          <p:cNvSpPr>
+            <a:spLocks noGrp="1" noRot="1" noChangeAspect="1"/>
+          </p:cNvSpPr>
+          <p:nvPr>
+            <p:ph type="sldImg"/>
+          </p:nvPr>
+        </p:nvSpPr>
+        <p:spPr/>
+      </p:sp>
+      <p:sp>
+        <p:nvSpPr>
+          <p:cNvPr id="3" name="Notes Placeholder 2"/>
+          <p:cNvSpPr>
+            <a:spLocks noGrp="1"/>
+          </p:cNvSpPr>
+          <p:nvPr>
+            <p:ph type="body" idx="1"/>
+          </p:nvPr>
+        </p:nvSpPr>
+        <p:spPr/>
+        <p:txBody>
+          <a:bodyPr/>
+          <a:lstStyle/>
+          <a:p>
+            <a:r>
+              <a:rPr lang="en-US" dirty="0"/>
+              <a:t>Ask two attendees to name the five layers out loud. Cheap check for retention.</a:t>
+            </a:r>
+            <a:endParaRPr lang="en-US" dirty="0"/>
+          </a:p>
+        </p:txBody>
+      </p:sp>
+      <p:sp>
+        <p:nvSpPr>
+          <p:cNvPr id="4" name="Slide Number Placeholder 3"/>
+          <p:cNvSpPr>
+            <a:spLocks noGrp="1"/>
+          </p:cNvSpPr>
+          <p:nvPr>
+            <p:ph type="sldNum" sz="quarter" idx="10"/>
+          </p:nvPr>
+        </p:nvSpPr>
+        <p:spPr/>
+        <p:txBody>
+          <a:bodyPr/>
+          <a:lstStyle/>
+          <a:p>
+            <a:fld id="{F7021451-1387-4CA6-816F-3879F97B5CBC}" type="slidenum">
+              <a:rPr lang="en-US"/>
+              <a:t>11</a:t>
             </a:fld>
             <a:endParaRPr lang="en-US"/>
           </a:p>
@@ -694,7 +788,7 @@
               <a:t>• Say the five words twice, slowly:
 •   Model, Runtime, Actions, Knowledge, Ops
 • Ask attendees to write them down
-• Reinforce: 'every day this week fits into these five layers'
+• Reinforce: 'the rest of the workshop fits into these five layers'
 • Reinforce: 'every agent you build fits into these five layers'
 • Every subsequent slide in this module drills into one layer</a:t>
             </a:r>
@@ -876,10 +970,9 @@
           <a:p>
             <a:r>
               <a:rPr lang="en-US" dirty="0"/>
-              <a:t>• Tee up Module 6 — three ways to run an agent
-• Path A: Prompt agent — Foundry runs it, no code
-• Path B: Hosted agent — your code, Foundry runs the container
-• Path C: your own code calling the Responses API
+              <a:t>• Tee up Module 6 — two hosting families (Foundry-hosted and self-hosted)
+• Foundry-hosted has two flavors: Prompt agent (config only) and Hosted agent (your code, containerized)
+• Self-hosted: your own code calling the Responses API
 • Don't teach them now — Module 6 does that in 35 min
 • Just plant the flag: 'this is a real decision point'</a:t>
             </a:r>
@@ -972,8 +1065,10 @@
               <a:t>• Actions = capability = what the agent can DO
 • Knowledge (next slide) = grounding = what the agent KNOWS
 • Keep these two concepts distinct — attendees conflate them
-• Three sources of actions: function tools, Toolbox, MCP
-• Day 2 covers function tools + Toolbox; Day 3 covers MCP end-to-end
+• Four sources of actions in this Actions layer: function tools, Toolbox, MCP, Skills
+•   Function tools + Toolbox = Day 2
+•   MCP end-to-end = Day 3
+•   Skills = awareness-only in this workshop (dedicated slide next)
 • When something breaks: 'is this an Actions bug or a Knowledge bug?'</a:t>
             </a:r>
             <a:endParaRPr lang="en-US" dirty="0"/>
@@ -1158,7 +1253,7 @@
               <a:t>• Ops = the unglamorous layer that makes agents production-worthy
 • Five sub-layers: identity, tracing, evaluation, cost/latency, deployment
 • Emphasize: evaluation is NOT a Day-5 topic
-• Eval appears every day this week (Days 2, 3, 4, 5)
+• Eval appears through the rest of the workshop (Days 2, 3, 4, 5)
 • Day 4 is the eval anchor module
 • Day 5 covers the rest of Ops (identity, tracing, cost, deployment)</a:t>
             </a:r>
@@ -1248,12 +1343,34 @@
           <a:p>
             <a:r>
               <a:rPr lang="en-US" dirty="0"/>
-              <a:t>• Every topic in the workshop fits into these five columns
-• If a topic feels orphaned to attendees, ask them to flag it
-• Walk the table row by row (~15 seconds per row)
-• Point out: 'eval' appears in every row from Day 2 onward
-• Day 4 = the multi-agent + eval anchor day
-• Day 5 = the Ops-heavy day</a:t>
+              <a:t>• NEW 2026-08-19: covers skills at awareness level (not taught deeper in this workshop)
+• 
+• PRESENTER GUIDANCE — When to use skills vs. other patterns:
+• (summarizing Learn — https://learn.microsoft.com/agent-framework/journey/adding-skills#when-to-use-skills-vs-other-patterns)
+• 
+•   Individual tools — best for one-off actions that don't need shared context.
+•     Example: a get_weather function tool.
+•   Skills — best for domain expertise with instructions, references, and optional scripts.
+•     Example: an 'expense-report' skill with policy docs, validation scripts,
+•     and step-by-step filing instructions.
+• 
+• Progressive disclosure — the mechanism that keeps skills context-cheap:
+•   1. Advertise — skill name + description (~100 tokens) in system prompt every run
+•   2. Load — full instructions loaded only when task matches (&lt; 5000 tokens recommended)
+•   3. Read resource — supplementary files (FAQs, templates) fetched only when needed
+• 
+• Under the hood: skills are built on top of tools. MAF exposes load_skill and
+• read_skill_resource as tool calls; the agent invokes them to progressively load content.
+• 
+• Common pitfalls to warn about:
+•   Overly broad skills — 'everything-about-finance' → too long, unfocused. Keep skills to one domain.
+•   Skipping security review — skill instructions inject into context; scripts execute code.
+•     Treat skills like third-party deps.
+•   Ignoring progressive disclosure — 2000-line SKILL.md defeats the point. Keep instructions
+•     concise; move detail to separate resource files.
+• 
+• This workshop: awareness only. Attendees leave knowing skills exist and when to reach for them.
+• Not taught deeper in Days 2-5 for the current cohort. Candidate topic for Cohort 2.</a:t>
             </a:r>
             <a:endParaRPr lang="en-US" dirty="0"/>
           </a:p>
@@ -1341,12 +1458,12 @@
           <a:p>
             <a:r>
               <a:rPr lang="en-US" dirty="0"/>
-              <a:t>• This is a soft-skills slide disguised as an architecture slide
-• The five layers give attendees vocabulary to talk to product / ops / security
-• 'The agent isn't grounded' = Knowledge problem, not Model problem
-• 'Adding an MCP tool' = Actions + Ops concern, not Model concern
-• Attendees will use this to argue for budget and roadmap items later
-• Encourage them to bring the vocabulary back to their teams</a:t>
+              <a:t>• Every topic in the workshop fits into these five columns
+• If a topic feels orphaned to attendees, ask them to flag it
+• Walk the table row by row (~15 seconds per row)
+• Point out: 'eval' appears in every row from Day 2 onward
+• Day 4 = the multi-agent + eval anchor day
+• Day 5 = the Ops-heavy day</a:t>
             </a:r>
             <a:endParaRPr lang="en-US" dirty="0"/>
           </a:p>
@@ -1830,7 +1947,7 @@
                 <a:ea typeface="Calibri" pitchFamily="34" charset="-122"/>
                 <a:cs typeface="Calibri" pitchFamily="34" charset="-120"/>
               </a:rPr>
-              <a:t>The mental model we use every day this week</a:t>
+              <a:t>The mental model we use</a:t>
             </a:r>
             <a:endParaRPr lang="en-US" sz="1800" dirty="0"/>
           </a:p>
@@ -1999,6 +2116,260 @@
                 <a:ea typeface="Calibri" pitchFamily="34" charset="-122"/>
                 <a:cs typeface="Calibri" pitchFamily="34" charset="-120"/>
               </a:rPr>
+              <a:t>Why this matters</a:t>
+            </a:r>
+            <a:endParaRPr lang="en-US" sz="2800" dirty="0"/>
+          </a:p>
+        </p:txBody>
+      </p:sp>
+      <p:sp>
+        <p:nvSpPr>
+          <p:cNvPr id="5" name="Text 3"/>
+          <p:cNvSpPr/>
+          <p:nvPr/>
+        </p:nvSpPr>
+        <p:spPr>
+          <a:xfrm>
+            <a:off x="365760" y="1097280"/>
+            <a:ext cx="8412480" cy="3749040"/>
+          </a:xfrm>
+          <a:prstGeom prst="rect">
+            <a:avLst/>
+          </a:prstGeom>
+          <a:noFill/>
+          <a:ln/>
+        </p:spPr>
+        <p:txBody>
+          <a:bodyPr wrap="square" rtlCol="0" anchor="ctr"/>
+          <a:lstStyle/>
+          <a:p>
+            <a:pPr marL="342900" indent="-342900">
+              <a:spcAft>
+                <a:spcPts val="600"/>
+              </a:spcAft>
+              <a:buSzPct val="100000"/>
+              <a:buChar char="•"/>
+            </a:pPr>
+            <a:r>
+              <a:rPr lang="en-US" sz="1500" dirty="0">
+                <a:solidFill>
+                  <a:srgbClr val="212121"/>
+                </a:solidFill>
+                <a:latin typeface="Calibri" pitchFamily="34" charset="0"/>
+                <a:ea typeface="Calibri" pitchFamily="34" charset="-122"/>
+                <a:cs typeface="Calibri" pitchFamily="34" charset="-120"/>
+              </a:rPr>
+              <a:t>Diagnose problems by layer — 'the agent isn't grounded' is a Knowledge problem, not a Model problem</a:t>
+            </a:r>
+            <a:endParaRPr lang="en-US" sz="1500" dirty="0"/>
+          </a:p>
+          <a:p>
+            <a:pPr marL="342900" indent="-342900">
+              <a:spcAft>
+                <a:spcPts val="600"/>
+              </a:spcAft>
+              <a:buSzPct val="100000"/>
+              <a:buChar char="•"/>
+            </a:pPr>
+            <a:r>
+              <a:rPr lang="en-US" sz="1500" dirty="0">
+                <a:solidFill>
+                  <a:srgbClr val="212121"/>
+                </a:solidFill>
+                <a:latin typeface="Calibri" pitchFamily="34" charset="0"/>
+                <a:ea typeface="Calibri" pitchFamily="34" charset="-122"/>
+                <a:cs typeface="Calibri" pitchFamily="34" charset="-120"/>
+              </a:rPr>
+              <a:t>Estimate cost and risk — adding an MCP server is an Actions + Ops concern, not a model concern</a:t>
+            </a:r>
+            <a:endParaRPr lang="en-US" sz="1500" dirty="0"/>
+          </a:p>
+          <a:p>
+            <a:pPr marL="342900" indent="-342900">
+              <a:spcAft>
+                <a:spcPts val="600"/>
+              </a:spcAft>
+              <a:buSzPct val="100000"/>
+              <a:buChar char="•"/>
+            </a:pPr>
+            <a:r>
+              <a:rPr lang="en-US" sz="1500" dirty="0">
+                <a:solidFill>
+                  <a:srgbClr val="212121"/>
+                </a:solidFill>
+                <a:latin typeface="Calibri" pitchFamily="34" charset="0"/>
+                <a:ea typeface="Calibri" pitchFamily="34" charset="-122"/>
+                <a:cs typeface="Calibri" pitchFamily="34" charset="-120"/>
+              </a:rPr>
+              <a:t>Communicate cleanly with stakeholders — product, ops, security all live at different layers</a:t>
+            </a:r>
+            <a:endParaRPr lang="en-US" sz="1500" dirty="0"/>
+          </a:p>
+        </p:txBody>
+      </p:sp>
+      <p:sp>
+        <p:nvSpPr>
+          <p:cNvPr id="6" name="Text 4"/>
+          <p:cNvSpPr/>
+          <p:nvPr/>
+        </p:nvSpPr>
+        <p:spPr>
+          <a:xfrm>
+            <a:off x="365760" y="4160520"/>
+            <a:ext cx="8412480" cy="365760"/>
+          </a:xfrm>
+          <a:prstGeom prst="rect">
+            <a:avLst/>
+          </a:prstGeom>
+          <a:noFill/>
+          <a:ln/>
+        </p:spPr>
+        <p:txBody>
+          <a:bodyPr wrap="square" rtlCol="0" anchor="ctr"/>
+          <a:lstStyle/>
+          <a:p>
+            <a:pPr indent="0" marL="0">
+              <a:buNone/>
+            </a:pPr>
+            <a:r>
+              <a:rPr lang="en-US" sz="1400" b="1" i="1" dirty="0">
+                <a:solidFill>
+                  <a:srgbClr val="1E2761"/>
+                </a:solidFill>
+                <a:latin typeface="Calibri" pitchFamily="34" charset="0"/>
+                <a:ea typeface="Calibri" pitchFamily="34" charset="-122"/>
+                <a:cs typeface="Calibri" pitchFamily="34" charset="-120"/>
+              </a:rPr>
+              <a:t>Bring this back to your team as a shared vocabulary.</a:t>
+            </a:r>
+            <a:endParaRPr lang="en-US" sz="1400" dirty="0"/>
+          </a:p>
+        </p:txBody>
+      </p:sp>
+    </p:spTree>
+  </p:cSld>
+  <p:clrMapOvr>
+    <a:masterClrMapping/>
+  </p:clrMapOvr>
+</p:sld>
+</file>
+
+<file path=ppt/slides/slide11.xml><?xml version="1.0" encoding="utf-8"?>
+<p:sld xmlns:a="http://schemas.openxmlformats.org/drawingml/2006/main" xmlns:r="http://schemas.openxmlformats.org/officeDocument/2006/relationships" xmlns:p="http://schemas.openxmlformats.org/presentationml/2006/main">
+  <p:cSld name="Slide 11">
+    <p:bg>
+      <p:bgPr>
+        <a:solidFill>
+          <a:srgbClr val="FFFFFF"/>
+        </a:solidFill>
+      </p:bgPr>
+    </p:bg>
+    <p:spTree>
+      <p:nvGrpSpPr>
+        <p:cNvPr id="1" name=""/>
+        <p:cNvGrpSpPr/>
+        <p:nvPr/>
+      </p:nvGrpSpPr>
+      <p:grpSpPr>
+        <a:xfrm>
+          <a:off x="0" y="0"/>
+          <a:ext cx="0" cy="0"/>
+          <a:chOff x="0" y="0"/>
+          <a:chExt cx="0" cy="0"/>
+        </a:xfrm>
+      </p:grpSpPr>
+      <p:sp>
+        <p:nvSpPr>
+          <p:cNvPr id="2" name="Shape 0"/>
+          <p:cNvSpPr/>
+          <p:nvPr/>
+        </p:nvSpPr>
+        <p:spPr>
+          <a:xfrm>
+            <a:off x="0" y="0"/>
+            <a:ext cx="54864" cy="5143500"/>
+          </a:xfrm>
+          <a:prstGeom prst="rect">
+            <a:avLst/>
+          </a:prstGeom>
+          <a:solidFill>
+            <a:srgbClr val="1E2761"/>
+          </a:solidFill>
+          <a:ln/>
+        </p:spPr>
+      </p:sp>
+      <p:sp>
+        <p:nvSpPr>
+          <p:cNvPr id="3" name="Text 1"/>
+          <p:cNvSpPr/>
+          <p:nvPr/>
+        </p:nvSpPr>
+        <p:spPr>
+          <a:xfrm>
+            <a:off x="5669280" y="274320"/>
+            <a:ext cx="3291840" cy="274320"/>
+          </a:xfrm>
+          <a:prstGeom prst="rect">
+            <a:avLst/>
+          </a:prstGeom>
+          <a:noFill/>
+          <a:ln/>
+        </p:spPr>
+        <p:txBody>
+          <a:bodyPr wrap="square" lIns="0" tIns="0" rIns="0" bIns="0" rtlCol="0" anchor="ctr"/>
+          <a:lstStyle/>
+          <a:p>
+            <a:pPr algn="r" indent="0" marL="0">
+              <a:buNone/>
+            </a:pPr>
+            <a:r>
+              <a:rPr lang="en-US" sz="1000" dirty="0">
+                <a:solidFill>
+                  <a:srgbClr val="6B7280"/>
+                </a:solidFill>
+                <a:latin typeface="Calibri" pitchFamily="34" charset="0"/>
+                <a:ea typeface="Calibri" pitchFamily="34" charset="-122"/>
+                <a:cs typeface="Calibri" pitchFamily="34" charset="-120"/>
+              </a:rPr>
+              <a:t>Day 1 · Module 5</a:t>
+            </a:r>
+            <a:endParaRPr lang="en-US" sz="1000" dirty="0"/>
+          </a:p>
+        </p:txBody>
+      </p:sp>
+      <p:sp>
+        <p:nvSpPr>
+          <p:cNvPr id="4" name="Text 2"/>
+          <p:cNvSpPr/>
+          <p:nvPr/>
+        </p:nvSpPr>
+        <p:spPr>
+          <a:xfrm>
+            <a:off x="365760" y="320040"/>
+            <a:ext cx="6217920" cy="640080"/>
+          </a:xfrm>
+          <a:prstGeom prst="rect">
+            <a:avLst/>
+          </a:prstGeom>
+          <a:noFill/>
+          <a:ln/>
+        </p:spPr>
+        <p:txBody>
+          <a:bodyPr wrap="square" lIns="0" tIns="0" rIns="0" bIns="0" rtlCol="0" anchor="ctr"/>
+          <a:lstStyle/>
+          <a:p>
+            <a:pPr indent="0" marL="0">
+              <a:buNone/>
+            </a:pPr>
+            <a:r>
+              <a:rPr lang="en-US" sz="2800" b="1" dirty="0">
+                <a:solidFill>
+                  <a:srgbClr val="1E2761"/>
+                </a:solidFill>
+                <a:latin typeface="Calibri" pitchFamily="34" charset="0"/>
+                <a:ea typeface="Calibri" pitchFamily="34" charset="-122"/>
+                <a:cs typeface="Calibri" pitchFamily="34" charset="-120"/>
+              </a:rPr>
               <a:t>Takeaways</a:t>
             </a:r>
             <a:endParaRPr lang="en-US" sz="2800" dirty="0"/>
@@ -2157,7 +2528,7 @@
                 <a:ea typeface="Calibri" pitchFamily="34" charset="-122"/>
                 <a:cs typeface="Calibri" pitchFamily="34" charset="-120"/>
               </a:rPr>
-              <a:t>Module 6 zooms into Layer 2 (Runtime) — the three ways to run an agent with Foundry.</a:t>
+              <a:t>Module 6 zooms into Layer 2 (Runtime) — the two hosting families for Agent Framework agents.</a:t>
             </a:r>
             <a:endParaRPr lang="en-US" sz="1600" dirty="0"/>
           </a:p>
@@ -2915,7 +3286,7 @@
                 <a:ea typeface="Calibri" pitchFamily="34" charset="-122"/>
                 <a:cs typeface="Calibri" pitchFamily="34" charset="-120"/>
               </a:rPr>
-              <a:t>Where the agent code and state live. Two choices:</a:t>
+              <a:t>Where the agent code and state live. Two hosting families:</a:t>
             </a:r>
             <a:endParaRPr lang="en-US" sz="1600" dirty="0"/>
           </a:p>
@@ -2958,7 +3329,7 @@
                 <a:ea typeface="Calibri" pitchFamily="34" charset="-122"/>
                 <a:cs typeface="Calibri" pitchFamily="34" charset="-120"/>
               </a:rPr>
-              <a:t>Prompt agent — portal- or SDK-authored, no code, Foundry runs it</a:t>
+              <a:t>Foundry-hosted · Prompt agent — portal- or SDK-authored, no code, Foundry runs it</a:t>
             </a:r>
             <a:endParaRPr lang="en-US" sz="1500" dirty="0"/>
           </a:p>
@@ -2979,7 +3350,7 @@
                 <a:ea typeface="Calibri" pitchFamily="34" charset="-122"/>
                 <a:cs typeface="Calibri" pitchFamily="34" charset="-120"/>
               </a:rPr>
-              <a:t>Hosted agent — your code, packaged as a container, Foundry runs the container</a:t>
+              <a:t>Foundry-hosted · Hosted agent — your code, packaged as a container, Foundry runs the container</a:t>
             </a:r>
             <a:endParaRPr lang="en-US" sz="1500" dirty="0"/>
           </a:p>
@@ -3000,7 +3371,7 @@
                 <a:ea typeface="Calibri" pitchFamily="34" charset="-122"/>
                 <a:cs typeface="Calibri" pitchFamily="34" charset="-120"/>
               </a:rPr>
-              <a:t>Your own code calling the Responses API — your process runs your code and calls Foundry for models and tools</a:t>
+              <a:t>Self-hosted — your process runs your code and calls Foundry for models and tools</a:t>
             </a:r>
             <a:endParaRPr lang="en-US" sz="1500" dirty="0"/>
           </a:p>
@@ -3039,7 +3410,7 @@
                 <a:ea typeface="Calibri" pitchFamily="34" charset="-122"/>
                 <a:cs typeface="Calibri" pitchFamily="34" charset="-120"/>
               </a:rPr>
-              <a:t>Module 6 is entirely about this choice. Both are legitimate; each has a sweet spot.</a:t>
+              <a:t>Module 6 is entirely about this choice. Each family has a sweet spot.</a:t>
             </a:r>
             <a:endParaRPr lang="en-US" sz="1400" dirty="0"/>
           </a:p>
@@ -3297,6 +3668,27 @@
             </a:r>
             <a:endParaRPr lang="en-US" sz="1500" dirty="0"/>
           </a:p>
+          <a:p>
+            <a:pPr marL="342900" indent="-342900">
+              <a:spcAft>
+                <a:spcPts val="600"/>
+              </a:spcAft>
+              <a:buSzPct val="100000"/>
+              <a:buChar char="•"/>
+            </a:pPr>
+            <a:r>
+              <a:rPr lang="en-US" sz="1500" dirty="0">
+                <a:solidFill>
+                  <a:srgbClr val="212121"/>
+                </a:solidFill>
+                <a:latin typeface="Calibri" pitchFamily="34" charset="0"/>
+                <a:ea typeface="Calibri" pitchFamily="34" charset="-122"/>
+                <a:cs typeface="Calibri" pitchFamily="34" charset="-120"/>
+              </a:rPr>
+              <a:t>Skills — portable packages of instructions + reference material + optional scripts, with progressive disclosure</a:t>
+            </a:r>
+            <a:endParaRPr lang="en-US" sz="1500" dirty="0"/>
+          </a:p>
         </p:txBody>
       </p:sp>
       <p:sp>
@@ -3308,7 +3700,7 @@
         <p:spPr>
           <a:xfrm>
             <a:off x="365760" y="3931920"/>
-            <a:ext cx="8412480" cy="548640"/>
+            <a:ext cx="8412480" cy="685800"/>
           </a:xfrm>
           <a:prstGeom prst="rect">
             <a:avLst/>
@@ -3324,7 +3716,7 @@
               <a:buNone/>
             </a:pPr>
             <a:r>
-              <a:rPr lang="en-US" sz="1400" i="1" dirty="0">
+              <a:rPr lang="en-US" sz="1300" i="1" dirty="0">
                 <a:solidFill>
                   <a:srgbClr val="212121"/>
                 </a:solidFill>
@@ -3332,9 +3724,9 @@
                 <a:ea typeface="Calibri" pitchFamily="34" charset="-122"/>
                 <a:cs typeface="Calibri" pitchFamily="34" charset="-120"/>
               </a:rPr>
-              <a:t>Day 2: function tools and Toolbox. Day 3: MCP end-to-end.</a:t>
+              <a:t>Day 2: function tools and Toolbox. Day 3: MCP end-to-end. Skills: awareness only in this workshop — see the dedicated slide below.</a:t>
             </a:r>
-            <a:endParaRPr lang="en-US" sz="1400" dirty="0"/>
+            <a:endParaRPr lang="en-US" sz="1300" dirty="0"/>
           </a:p>
         </p:txBody>
       </p:sp>
@@ -4069,6 +4461,1509 @@
                 <a:ea typeface="Calibri" pitchFamily="34" charset="-122"/>
                 <a:cs typeface="Calibri" pitchFamily="34" charset="-120"/>
               </a:rPr>
+              <a:t>Skills — packaging expertise for reuse</a:t>
+            </a:r>
+            <a:endParaRPr lang="en-US" sz="2800" dirty="0"/>
+          </a:p>
+        </p:txBody>
+      </p:sp>
+      <p:sp>
+        <p:nvSpPr>
+          <p:cNvPr id="5" name="Text 3"/>
+          <p:cNvSpPr/>
+          <p:nvPr/>
+        </p:nvSpPr>
+        <p:spPr>
+          <a:xfrm>
+            <a:off x="365760" y="1097280"/>
+            <a:ext cx="8412480" cy="822960"/>
+          </a:xfrm>
+          <a:prstGeom prst="rect">
+            <a:avLst/>
+          </a:prstGeom>
+          <a:noFill/>
+          <a:ln/>
+        </p:spPr>
+        <p:txBody>
+          <a:bodyPr wrap="square" rtlCol="0" anchor="ctr"/>
+          <a:lstStyle/>
+          <a:p>
+            <a:pPr indent="0" marL="0">
+              <a:buNone/>
+            </a:pPr>
+            <a:r>
+              <a:rPr lang="en-US" sz="1300" dirty="0">
+                <a:solidFill>
+                  <a:srgbClr val="212121"/>
+                </a:solidFill>
+                <a:latin typeface="Calibri" pitchFamily="34" charset="0"/>
+                <a:ea typeface="Calibri" pitchFamily="34" charset="-122"/>
+                <a:cs typeface="Calibri" pitchFamily="34" charset="-120"/>
+              </a:rPr>
+              <a:t>A skill is a portable package that bundles instructions, reference material, and optional scripts into a single unit that any agent can discover and load on demand.</a:t>
+            </a:r>
+            <a:endParaRPr lang="en-US" sz="1300" dirty="0"/>
+          </a:p>
+        </p:txBody>
+      </p:sp>
+      <p:graphicFrame>
+        <p:nvGraphicFramePr>
+          <p:cNvPr id="9" name="Table 0"/>
+          <p:cNvGraphicFramePr>
+            <a:graphicFrameLocks noGrp="1"/>
+          </p:cNvGraphicFramePr>
+          <p:nvPr>
+            <p:extLst>
+              <p:ext uri="{D42A27DB-BD31-4B8C-83A1-F6EECF244321}">
+                <p14:modId xmlns:p14="http://schemas.microsoft.com/office/powerpoint/2010/main" val="1579011935"/>
+              </p:ext>
+            </p:extLst>
+          </p:nvPr>
+        </p:nvGraphicFramePr>
+        <p:xfrm>
+          <a:off x="365760" y="1097280"/>
+          <a:ext cx="8412480" cy="914400"/>
+        </p:xfrm>
+        <a:graphic>
+          <a:graphicData uri="http://schemas.openxmlformats.org/drawingml/2006/table">
+            <a:tbl>
+              <a:tblPr/>
+              <a:tblGrid>
+                <a:gridCol w="1554480"/>
+                <a:gridCol w="3108960"/>
+                <a:gridCol w="3749040"/>
+              </a:tblGrid>
+              <a:tr h="502920">
+                <a:tc>
+                  <a:txBody>
+                    <a:bodyPr/>
+                    <a:lstStyle/>
+                    <a:p>
+                      <a:pPr indent="0" marL="0">
+                        <a:buNone/>
+                      </a:pPr>
+                      <a:endParaRPr lang="en-US" sz="1000" dirty="0">
+                        <a:latin typeface="Calibri" charset="0"/>
+                        <a:ea typeface="Calibri" charset="0"/>
+                        <a:cs typeface="Calibri" charset="0"/>
+                      </a:endParaRPr>
+                    </a:p>
+                  </a:txBody>
+                  <a:tcPr marL="54864" marR="54864" marT="54864" marB="54864" anchor="ctr">
+                    <a:lnL w="6350" cap="flat" cmpd="sng" algn="ctr">
+                      <a:solidFill>
+                        <a:srgbClr val="D1D5DB"/>
+                      </a:solidFill>
+                      <a:prstDash val="solid"/>
+                      <a:round/>
+                      <a:headEnd type="none" w="med" len="med"/>
+                      <a:tailEnd type="none" w="med" len="med"/>
+                    </a:lnL>
+                    <a:lnR w="6350" cap="flat" cmpd="sng" algn="ctr">
+                      <a:solidFill>
+                        <a:srgbClr val="D1D5DB"/>
+                      </a:solidFill>
+                      <a:prstDash val="solid"/>
+                      <a:round/>
+                      <a:headEnd type="none" w="med" len="med"/>
+                      <a:tailEnd type="none" w="med" len="med"/>
+                    </a:lnR>
+                    <a:lnT w="6350" cap="flat" cmpd="sng" algn="ctr">
+                      <a:solidFill>
+                        <a:srgbClr val="D1D5DB"/>
+                      </a:solidFill>
+                      <a:prstDash val="solid"/>
+                      <a:round/>
+                      <a:headEnd type="none" w="med" len="med"/>
+                      <a:tailEnd type="none" w="med" len="med"/>
+                    </a:lnT>
+                    <a:lnB w="6350" cap="flat" cmpd="sng" algn="ctr">
+                      <a:solidFill>
+                        <a:srgbClr val="D1D5DB"/>
+                      </a:solidFill>
+                      <a:prstDash val="solid"/>
+                      <a:round/>
+                      <a:headEnd type="none" w="med" len="med"/>
+                      <a:tailEnd type="none" w="med" len="med"/>
+                    </a:lnB>
+                    <a:solidFill>
+                      <a:srgbClr val="1E2761"/>
+                    </a:solidFill>
+                  </a:tcPr>
+                </a:tc>
+                <a:tc>
+                  <a:txBody>
+                    <a:bodyPr/>
+                    <a:lstStyle/>
+                    <a:p>
+                      <a:pPr indent="0" marL="0">
+                        <a:buNone/>
+                      </a:pPr>
+                      <a:r>
+                        <a:rPr lang="en-US" sz="1000" b="1" dirty="0">
+                          <a:solidFill>
+                            <a:srgbClr val="FFFFFF"/>
+                          </a:solidFill>
+                          <a:latin typeface="Calibri" pitchFamily="34" charset="0"/>
+                          <a:ea typeface="Calibri" pitchFamily="34" charset="-122"/>
+                          <a:cs typeface="Calibri" pitchFamily="34" charset="-120"/>
+                        </a:rPr>
+                        <a:t>Tool</a:t>
+                      </a:r>
+                      <a:endParaRPr lang="en-US" sz="1000" dirty="0">
+                        <a:latin typeface="Calibri" charset="0"/>
+                        <a:ea typeface="Calibri" charset="0"/>
+                        <a:cs typeface="Calibri" charset="0"/>
+                      </a:endParaRPr>
+                    </a:p>
+                  </a:txBody>
+                  <a:tcPr marL="54864" marR="54864" marT="54864" marB="54864" anchor="ctr">
+                    <a:lnL w="6350" cap="flat" cmpd="sng" algn="ctr">
+                      <a:solidFill>
+                        <a:srgbClr val="D1D5DB"/>
+                      </a:solidFill>
+                      <a:prstDash val="solid"/>
+                      <a:round/>
+                      <a:headEnd type="none" w="med" len="med"/>
+                      <a:tailEnd type="none" w="med" len="med"/>
+                    </a:lnL>
+                    <a:lnR w="6350" cap="flat" cmpd="sng" algn="ctr">
+                      <a:solidFill>
+                        <a:srgbClr val="D1D5DB"/>
+                      </a:solidFill>
+                      <a:prstDash val="solid"/>
+                      <a:round/>
+                      <a:headEnd type="none" w="med" len="med"/>
+                      <a:tailEnd type="none" w="med" len="med"/>
+                    </a:lnR>
+                    <a:lnT w="6350" cap="flat" cmpd="sng" algn="ctr">
+                      <a:solidFill>
+                        <a:srgbClr val="D1D5DB"/>
+                      </a:solidFill>
+                      <a:prstDash val="solid"/>
+                      <a:round/>
+                      <a:headEnd type="none" w="med" len="med"/>
+                      <a:tailEnd type="none" w="med" len="med"/>
+                    </a:lnT>
+                    <a:lnB w="6350" cap="flat" cmpd="sng" algn="ctr">
+                      <a:solidFill>
+                        <a:srgbClr val="D1D5DB"/>
+                      </a:solidFill>
+                      <a:prstDash val="solid"/>
+                      <a:round/>
+                      <a:headEnd type="none" w="med" len="med"/>
+                      <a:tailEnd type="none" w="med" len="med"/>
+                    </a:lnB>
+                    <a:solidFill>
+                      <a:srgbClr val="1E2761"/>
+                    </a:solidFill>
+                  </a:tcPr>
+                </a:tc>
+                <a:tc>
+                  <a:txBody>
+                    <a:bodyPr/>
+                    <a:lstStyle/>
+                    <a:p>
+                      <a:pPr indent="0" marL="0">
+                        <a:buNone/>
+                      </a:pPr>
+                      <a:r>
+                        <a:rPr lang="en-US" sz="1000" b="1" dirty="0">
+                          <a:solidFill>
+                            <a:srgbClr val="FFFFFF"/>
+                          </a:solidFill>
+                          <a:latin typeface="Calibri" pitchFamily="34" charset="0"/>
+                          <a:ea typeface="Calibri" pitchFamily="34" charset="-122"/>
+                          <a:cs typeface="Calibri" pitchFamily="34" charset="-120"/>
+                        </a:rPr>
+                        <a:t>Skill</a:t>
+                      </a:r>
+                      <a:endParaRPr lang="en-US" sz="1000" dirty="0">
+                        <a:latin typeface="Calibri" charset="0"/>
+                        <a:ea typeface="Calibri" charset="0"/>
+                        <a:cs typeface="Calibri" charset="0"/>
+                      </a:endParaRPr>
+                    </a:p>
+                  </a:txBody>
+                  <a:tcPr marL="54864" marR="54864" marT="54864" marB="54864" anchor="ctr">
+                    <a:lnL w="6350" cap="flat" cmpd="sng" algn="ctr">
+                      <a:solidFill>
+                        <a:srgbClr val="D1D5DB"/>
+                      </a:solidFill>
+                      <a:prstDash val="solid"/>
+                      <a:round/>
+                      <a:headEnd type="none" w="med" len="med"/>
+                      <a:tailEnd type="none" w="med" len="med"/>
+                    </a:lnL>
+                    <a:lnR w="6350" cap="flat" cmpd="sng" algn="ctr">
+                      <a:solidFill>
+                        <a:srgbClr val="D1D5DB"/>
+                      </a:solidFill>
+                      <a:prstDash val="solid"/>
+                      <a:round/>
+                      <a:headEnd type="none" w="med" len="med"/>
+                      <a:tailEnd type="none" w="med" len="med"/>
+                    </a:lnR>
+                    <a:lnT w="6350" cap="flat" cmpd="sng" algn="ctr">
+                      <a:solidFill>
+                        <a:srgbClr val="D1D5DB"/>
+                      </a:solidFill>
+                      <a:prstDash val="solid"/>
+                      <a:round/>
+                      <a:headEnd type="none" w="med" len="med"/>
+                      <a:tailEnd type="none" w="med" len="med"/>
+                    </a:lnT>
+                    <a:lnB w="6350" cap="flat" cmpd="sng" algn="ctr">
+                      <a:solidFill>
+                        <a:srgbClr val="D1D5DB"/>
+                      </a:solidFill>
+                      <a:prstDash val="solid"/>
+                      <a:round/>
+                      <a:headEnd type="none" w="med" len="med"/>
+                      <a:tailEnd type="none" w="med" len="med"/>
+                    </a:lnB>
+                    <a:solidFill>
+                      <a:srgbClr val="1E2761"/>
+                    </a:solidFill>
+                  </a:tcPr>
+                </a:tc>
+              </a:tr>
+              <a:tr h="502920">
+                <a:tc>
+                  <a:txBody>
+                    <a:bodyPr/>
+                    <a:lstStyle/>
+                    <a:p>
+                      <a:pPr indent="0" marL="0">
+                        <a:buNone/>
+                      </a:pPr>
+                      <a:r>
+                        <a:rPr lang="en-US" sz="1000" dirty="0">
+                          <a:solidFill>
+                            <a:srgbClr val="212121"/>
+                          </a:solidFill>
+                          <a:latin typeface="Calibri" pitchFamily="34" charset="0"/>
+                          <a:ea typeface="Calibri" pitchFamily="34" charset="-122"/>
+                          <a:cs typeface="Calibri" pitchFamily="34" charset="-120"/>
+                        </a:rPr>
+                        <a:t>What it provides</a:t>
+                      </a:r>
+                      <a:endParaRPr lang="en-US" sz="1000" dirty="0">
+                        <a:latin typeface="Calibri" charset="0"/>
+                        <a:ea typeface="Calibri" charset="0"/>
+                        <a:cs typeface="Calibri" charset="0"/>
+                      </a:endParaRPr>
+                    </a:p>
+                  </a:txBody>
+                  <a:tcPr marL="54864" marR="54864" marT="54864" marB="54864" anchor="ctr">
+                    <a:lnL w="6350" cap="flat" cmpd="sng" algn="ctr">
+                      <a:solidFill>
+                        <a:srgbClr val="D1D5DB"/>
+                      </a:solidFill>
+                      <a:prstDash val="solid"/>
+                      <a:round/>
+                      <a:headEnd type="none" w="med" len="med"/>
+                      <a:tailEnd type="none" w="med" len="med"/>
+                    </a:lnL>
+                    <a:lnR w="6350" cap="flat" cmpd="sng" algn="ctr">
+                      <a:solidFill>
+                        <a:srgbClr val="D1D5DB"/>
+                      </a:solidFill>
+                      <a:prstDash val="solid"/>
+                      <a:round/>
+                      <a:headEnd type="none" w="med" len="med"/>
+                      <a:tailEnd type="none" w="med" len="med"/>
+                    </a:lnR>
+                    <a:lnT w="6350" cap="flat" cmpd="sng" algn="ctr">
+                      <a:solidFill>
+                        <a:srgbClr val="D1D5DB"/>
+                      </a:solidFill>
+                      <a:prstDash val="solid"/>
+                      <a:round/>
+                      <a:headEnd type="none" w="med" len="med"/>
+                      <a:tailEnd type="none" w="med" len="med"/>
+                    </a:lnT>
+                    <a:lnB w="6350" cap="flat" cmpd="sng" algn="ctr">
+                      <a:solidFill>
+                        <a:srgbClr val="D1D5DB"/>
+                      </a:solidFill>
+                      <a:prstDash val="solid"/>
+                      <a:round/>
+                      <a:headEnd type="none" w="med" len="med"/>
+                      <a:tailEnd type="none" w="med" len="med"/>
+                    </a:lnB>
+                    <a:solidFill>
+                      <a:srgbClr val="FFFFFF"/>
+                    </a:solidFill>
+                  </a:tcPr>
+                </a:tc>
+                <a:tc>
+                  <a:txBody>
+                    <a:bodyPr/>
+                    <a:lstStyle/>
+                    <a:p>
+                      <a:pPr indent="0" marL="0">
+                        <a:buNone/>
+                      </a:pPr>
+                      <a:r>
+                        <a:rPr lang="en-US" sz="1000" dirty="0">
+                          <a:solidFill>
+                            <a:srgbClr val="212121"/>
+                          </a:solidFill>
+                          <a:latin typeface="Calibri" pitchFamily="34" charset="0"/>
+                          <a:ea typeface="Calibri" pitchFamily="34" charset="-122"/>
+                          <a:cs typeface="Calibri" pitchFamily="34" charset="-120"/>
+                        </a:rPr>
+                        <a:t>A single callable action</a:t>
+                      </a:r>
+                      <a:endParaRPr lang="en-US" sz="1000" dirty="0">
+                        <a:latin typeface="Calibri" charset="0"/>
+                        <a:ea typeface="Calibri" charset="0"/>
+                        <a:cs typeface="Calibri" charset="0"/>
+                      </a:endParaRPr>
+                    </a:p>
+                  </a:txBody>
+                  <a:tcPr marL="54864" marR="54864" marT="54864" marB="54864" anchor="ctr">
+                    <a:lnL w="6350" cap="flat" cmpd="sng" algn="ctr">
+                      <a:solidFill>
+                        <a:srgbClr val="D1D5DB"/>
+                      </a:solidFill>
+                      <a:prstDash val="solid"/>
+                      <a:round/>
+                      <a:headEnd type="none" w="med" len="med"/>
+                      <a:tailEnd type="none" w="med" len="med"/>
+                    </a:lnL>
+                    <a:lnR w="6350" cap="flat" cmpd="sng" algn="ctr">
+                      <a:solidFill>
+                        <a:srgbClr val="D1D5DB"/>
+                      </a:solidFill>
+                      <a:prstDash val="solid"/>
+                      <a:round/>
+                      <a:headEnd type="none" w="med" len="med"/>
+                      <a:tailEnd type="none" w="med" len="med"/>
+                    </a:lnR>
+                    <a:lnT w="6350" cap="flat" cmpd="sng" algn="ctr">
+                      <a:solidFill>
+                        <a:srgbClr val="D1D5DB"/>
+                      </a:solidFill>
+                      <a:prstDash val="solid"/>
+                      <a:round/>
+                      <a:headEnd type="none" w="med" len="med"/>
+                      <a:tailEnd type="none" w="med" len="med"/>
+                    </a:lnT>
+                    <a:lnB w="6350" cap="flat" cmpd="sng" algn="ctr">
+                      <a:solidFill>
+                        <a:srgbClr val="D1D5DB"/>
+                      </a:solidFill>
+                      <a:prstDash val="solid"/>
+                      <a:round/>
+                      <a:headEnd type="none" w="med" len="med"/>
+                      <a:tailEnd type="none" w="med" len="med"/>
+                    </a:lnB>
+                    <a:solidFill>
+                      <a:srgbClr val="FFFFFF"/>
+                    </a:solidFill>
+                  </a:tcPr>
+                </a:tc>
+                <a:tc>
+                  <a:txBody>
+                    <a:bodyPr/>
+                    <a:lstStyle/>
+                    <a:p>
+                      <a:pPr indent="0" marL="0">
+                        <a:buNone/>
+                      </a:pPr>
+                      <a:r>
+                        <a:rPr lang="en-US" sz="1000" dirty="0">
+                          <a:solidFill>
+                            <a:srgbClr val="212121"/>
+                          </a:solidFill>
+                          <a:latin typeface="Calibri" pitchFamily="34" charset="0"/>
+                          <a:ea typeface="Calibri" pitchFamily="34" charset="-122"/>
+                          <a:cs typeface="Calibri" pitchFamily="34" charset="-120"/>
+                        </a:rPr>
+                        <a:t>Instructions + reference material + optional scripts</a:t>
+                      </a:r>
+                      <a:endParaRPr lang="en-US" sz="1000" dirty="0">
+                        <a:latin typeface="Calibri" charset="0"/>
+                        <a:ea typeface="Calibri" charset="0"/>
+                        <a:cs typeface="Calibri" charset="0"/>
+                      </a:endParaRPr>
+                    </a:p>
+                  </a:txBody>
+                  <a:tcPr marL="54864" marR="54864" marT="54864" marB="54864" anchor="ctr">
+                    <a:lnL w="6350" cap="flat" cmpd="sng" algn="ctr">
+                      <a:solidFill>
+                        <a:srgbClr val="D1D5DB"/>
+                      </a:solidFill>
+                      <a:prstDash val="solid"/>
+                      <a:round/>
+                      <a:headEnd type="none" w="med" len="med"/>
+                      <a:tailEnd type="none" w="med" len="med"/>
+                    </a:lnL>
+                    <a:lnR w="6350" cap="flat" cmpd="sng" algn="ctr">
+                      <a:solidFill>
+                        <a:srgbClr val="D1D5DB"/>
+                      </a:solidFill>
+                      <a:prstDash val="solid"/>
+                      <a:round/>
+                      <a:headEnd type="none" w="med" len="med"/>
+                      <a:tailEnd type="none" w="med" len="med"/>
+                    </a:lnR>
+                    <a:lnT w="6350" cap="flat" cmpd="sng" algn="ctr">
+                      <a:solidFill>
+                        <a:srgbClr val="D1D5DB"/>
+                      </a:solidFill>
+                      <a:prstDash val="solid"/>
+                      <a:round/>
+                      <a:headEnd type="none" w="med" len="med"/>
+                      <a:tailEnd type="none" w="med" len="med"/>
+                    </a:lnT>
+                    <a:lnB w="6350" cap="flat" cmpd="sng" algn="ctr">
+                      <a:solidFill>
+                        <a:srgbClr val="D1D5DB"/>
+                      </a:solidFill>
+                      <a:prstDash val="solid"/>
+                      <a:round/>
+                      <a:headEnd type="none" w="med" len="med"/>
+                      <a:tailEnd type="none" w="med" len="med"/>
+                    </a:lnB>
+                    <a:solidFill>
+                      <a:srgbClr val="FFFFFF"/>
+                    </a:solidFill>
+                  </a:tcPr>
+                </a:tc>
+              </a:tr>
+              <a:tr h="502920">
+                <a:tc>
+                  <a:txBody>
+                    <a:bodyPr/>
+                    <a:lstStyle/>
+                    <a:p>
+                      <a:pPr indent="0" marL="0">
+                        <a:buNone/>
+                      </a:pPr>
+                      <a:r>
+                        <a:rPr lang="en-US" sz="1000" dirty="0">
+                          <a:solidFill>
+                            <a:srgbClr val="212121"/>
+                          </a:solidFill>
+                          <a:latin typeface="Calibri" pitchFamily="34" charset="0"/>
+                          <a:ea typeface="Calibri" pitchFamily="34" charset="-122"/>
+                          <a:cs typeface="Calibri" pitchFamily="34" charset="-120"/>
+                        </a:rPr>
+                        <a:t>How agent uses it</a:t>
+                      </a:r>
+                      <a:endParaRPr lang="en-US" sz="1000" dirty="0">
+                        <a:latin typeface="Calibri" charset="0"/>
+                        <a:ea typeface="Calibri" charset="0"/>
+                        <a:cs typeface="Calibri" charset="0"/>
+                      </a:endParaRPr>
+                    </a:p>
+                  </a:txBody>
+                  <a:tcPr marL="54864" marR="54864" marT="54864" marB="54864" anchor="ctr">
+                    <a:lnL w="6350" cap="flat" cmpd="sng" algn="ctr">
+                      <a:solidFill>
+                        <a:srgbClr val="D1D5DB"/>
+                      </a:solidFill>
+                      <a:prstDash val="solid"/>
+                      <a:round/>
+                      <a:headEnd type="none" w="med" len="med"/>
+                      <a:tailEnd type="none" w="med" len="med"/>
+                    </a:lnL>
+                    <a:lnR w="6350" cap="flat" cmpd="sng" algn="ctr">
+                      <a:solidFill>
+                        <a:srgbClr val="D1D5DB"/>
+                      </a:solidFill>
+                      <a:prstDash val="solid"/>
+                      <a:round/>
+                      <a:headEnd type="none" w="med" len="med"/>
+                      <a:tailEnd type="none" w="med" len="med"/>
+                    </a:lnR>
+                    <a:lnT w="6350" cap="flat" cmpd="sng" algn="ctr">
+                      <a:solidFill>
+                        <a:srgbClr val="D1D5DB"/>
+                      </a:solidFill>
+                      <a:prstDash val="solid"/>
+                      <a:round/>
+                      <a:headEnd type="none" w="med" len="med"/>
+                      <a:tailEnd type="none" w="med" len="med"/>
+                    </a:lnT>
+                    <a:lnB w="6350" cap="flat" cmpd="sng" algn="ctr">
+                      <a:solidFill>
+                        <a:srgbClr val="D1D5DB"/>
+                      </a:solidFill>
+                      <a:prstDash val="solid"/>
+                      <a:round/>
+                      <a:headEnd type="none" w="med" len="med"/>
+                      <a:tailEnd type="none" w="med" len="med"/>
+                    </a:lnB>
+                    <a:solidFill>
+                      <a:srgbClr val="F3F4F6"/>
+                    </a:solidFill>
+                  </a:tcPr>
+                </a:tc>
+                <a:tc>
+                  <a:txBody>
+                    <a:bodyPr/>
+                    <a:lstStyle/>
+                    <a:p>
+                      <a:pPr indent="0" marL="0">
+                        <a:buNone/>
+                      </a:pPr>
+                      <a:r>
+                        <a:rPr lang="en-US" sz="1000" dirty="0">
+                          <a:solidFill>
+                            <a:srgbClr val="212121"/>
+                          </a:solidFill>
+                          <a:latin typeface="Calibri" pitchFamily="34" charset="0"/>
+                          <a:ea typeface="Calibri" pitchFamily="34" charset="-122"/>
+                          <a:cs typeface="Calibri" pitchFamily="34" charset="-120"/>
+                        </a:rPr>
+                        <a:t>Calls it when it needs to act</a:t>
+                      </a:r>
+                      <a:endParaRPr lang="en-US" sz="1000" dirty="0">
+                        <a:latin typeface="Calibri" charset="0"/>
+                        <a:ea typeface="Calibri" charset="0"/>
+                        <a:cs typeface="Calibri" charset="0"/>
+                      </a:endParaRPr>
+                    </a:p>
+                  </a:txBody>
+                  <a:tcPr marL="54864" marR="54864" marT="54864" marB="54864" anchor="ctr">
+                    <a:lnL w="6350" cap="flat" cmpd="sng" algn="ctr">
+                      <a:solidFill>
+                        <a:srgbClr val="D1D5DB"/>
+                      </a:solidFill>
+                      <a:prstDash val="solid"/>
+                      <a:round/>
+                      <a:headEnd type="none" w="med" len="med"/>
+                      <a:tailEnd type="none" w="med" len="med"/>
+                    </a:lnL>
+                    <a:lnR w="6350" cap="flat" cmpd="sng" algn="ctr">
+                      <a:solidFill>
+                        <a:srgbClr val="D1D5DB"/>
+                      </a:solidFill>
+                      <a:prstDash val="solid"/>
+                      <a:round/>
+                      <a:headEnd type="none" w="med" len="med"/>
+                      <a:tailEnd type="none" w="med" len="med"/>
+                    </a:lnR>
+                    <a:lnT w="6350" cap="flat" cmpd="sng" algn="ctr">
+                      <a:solidFill>
+                        <a:srgbClr val="D1D5DB"/>
+                      </a:solidFill>
+                      <a:prstDash val="solid"/>
+                      <a:round/>
+                      <a:headEnd type="none" w="med" len="med"/>
+                      <a:tailEnd type="none" w="med" len="med"/>
+                    </a:lnT>
+                    <a:lnB w="6350" cap="flat" cmpd="sng" algn="ctr">
+                      <a:solidFill>
+                        <a:srgbClr val="D1D5DB"/>
+                      </a:solidFill>
+                      <a:prstDash val="solid"/>
+                      <a:round/>
+                      <a:headEnd type="none" w="med" len="med"/>
+                      <a:tailEnd type="none" w="med" len="med"/>
+                    </a:lnB>
+                    <a:solidFill>
+                      <a:srgbClr val="F3F4F6"/>
+                    </a:solidFill>
+                  </a:tcPr>
+                </a:tc>
+                <a:tc>
+                  <a:txBody>
+                    <a:bodyPr/>
+                    <a:lstStyle/>
+                    <a:p>
+                      <a:pPr indent="0" marL="0">
+                        <a:buNone/>
+                      </a:pPr>
+                      <a:r>
+                        <a:rPr lang="en-US" sz="1000" dirty="0">
+                          <a:solidFill>
+                            <a:srgbClr val="212121"/>
+                          </a:solidFill>
+                          <a:latin typeface="Calibri" pitchFamily="34" charset="0"/>
+                          <a:ea typeface="Calibri" pitchFamily="34" charset="-122"/>
+                          <a:cs typeface="Calibri" pitchFamily="34" charset="-120"/>
+                        </a:rPr>
+                        <a:t>Loads it when task matches; reads instructions; may call scripts</a:t>
+                      </a:r>
+                      <a:endParaRPr lang="en-US" sz="1000" dirty="0">
+                        <a:latin typeface="Calibri" charset="0"/>
+                        <a:ea typeface="Calibri" charset="0"/>
+                        <a:cs typeface="Calibri" charset="0"/>
+                      </a:endParaRPr>
+                    </a:p>
+                  </a:txBody>
+                  <a:tcPr marL="54864" marR="54864" marT="54864" marB="54864" anchor="ctr">
+                    <a:lnL w="6350" cap="flat" cmpd="sng" algn="ctr">
+                      <a:solidFill>
+                        <a:srgbClr val="D1D5DB"/>
+                      </a:solidFill>
+                      <a:prstDash val="solid"/>
+                      <a:round/>
+                      <a:headEnd type="none" w="med" len="med"/>
+                      <a:tailEnd type="none" w="med" len="med"/>
+                    </a:lnL>
+                    <a:lnR w="6350" cap="flat" cmpd="sng" algn="ctr">
+                      <a:solidFill>
+                        <a:srgbClr val="D1D5DB"/>
+                      </a:solidFill>
+                      <a:prstDash val="solid"/>
+                      <a:round/>
+                      <a:headEnd type="none" w="med" len="med"/>
+                      <a:tailEnd type="none" w="med" len="med"/>
+                    </a:lnR>
+                    <a:lnT w="6350" cap="flat" cmpd="sng" algn="ctr">
+                      <a:solidFill>
+                        <a:srgbClr val="D1D5DB"/>
+                      </a:solidFill>
+                      <a:prstDash val="solid"/>
+                      <a:round/>
+                      <a:headEnd type="none" w="med" len="med"/>
+                      <a:tailEnd type="none" w="med" len="med"/>
+                    </a:lnT>
+                    <a:lnB w="6350" cap="flat" cmpd="sng" algn="ctr">
+                      <a:solidFill>
+                        <a:srgbClr val="D1D5DB"/>
+                      </a:solidFill>
+                      <a:prstDash val="solid"/>
+                      <a:round/>
+                      <a:headEnd type="none" w="med" len="med"/>
+                      <a:tailEnd type="none" w="med" len="med"/>
+                    </a:lnB>
+                    <a:solidFill>
+                      <a:srgbClr val="F3F4F6"/>
+                    </a:solidFill>
+                  </a:tcPr>
+                </a:tc>
+              </a:tr>
+              <a:tr h="502920">
+                <a:tc>
+                  <a:txBody>
+                    <a:bodyPr/>
+                    <a:lstStyle/>
+                    <a:p>
+                      <a:pPr indent="0" marL="0">
+                        <a:buNone/>
+                      </a:pPr>
+                      <a:r>
+                        <a:rPr lang="en-US" sz="1000" dirty="0">
+                          <a:solidFill>
+                            <a:srgbClr val="212121"/>
+                          </a:solidFill>
+                          <a:latin typeface="Calibri" pitchFamily="34" charset="0"/>
+                          <a:ea typeface="Calibri" pitchFamily="34" charset="-122"/>
+                          <a:cs typeface="Calibri" pitchFamily="34" charset="-120"/>
+                        </a:rPr>
+                        <a:t>Context cost</a:t>
+                      </a:r>
+                      <a:endParaRPr lang="en-US" sz="1000" dirty="0">
+                        <a:latin typeface="Calibri" charset="0"/>
+                        <a:ea typeface="Calibri" charset="0"/>
+                        <a:cs typeface="Calibri" charset="0"/>
+                      </a:endParaRPr>
+                    </a:p>
+                  </a:txBody>
+                  <a:tcPr marL="54864" marR="54864" marT="54864" marB="54864" anchor="ctr">
+                    <a:lnL w="6350" cap="flat" cmpd="sng" algn="ctr">
+                      <a:solidFill>
+                        <a:srgbClr val="D1D5DB"/>
+                      </a:solidFill>
+                      <a:prstDash val="solid"/>
+                      <a:round/>
+                      <a:headEnd type="none" w="med" len="med"/>
+                      <a:tailEnd type="none" w="med" len="med"/>
+                    </a:lnL>
+                    <a:lnR w="6350" cap="flat" cmpd="sng" algn="ctr">
+                      <a:solidFill>
+                        <a:srgbClr val="D1D5DB"/>
+                      </a:solidFill>
+                      <a:prstDash val="solid"/>
+                      <a:round/>
+                      <a:headEnd type="none" w="med" len="med"/>
+                      <a:tailEnd type="none" w="med" len="med"/>
+                    </a:lnR>
+                    <a:lnT w="6350" cap="flat" cmpd="sng" algn="ctr">
+                      <a:solidFill>
+                        <a:srgbClr val="D1D5DB"/>
+                      </a:solidFill>
+                      <a:prstDash val="solid"/>
+                      <a:round/>
+                      <a:headEnd type="none" w="med" len="med"/>
+                      <a:tailEnd type="none" w="med" len="med"/>
+                    </a:lnT>
+                    <a:lnB w="6350" cap="flat" cmpd="sng" algn="ctr">
+                      <a:solidFill>
+                        <a:srgbClr val="D1D5DB"/>
+                      </a:solidFill>
+                      <a:prstDash val="solid"/>
+                      <a:round/>
+                      <a:headEnd type="none" w="med" len="med"/>
+                      <a:tailEnd type="none" w="med" len="med"/>
+                    </a:lnB>
+                    <a:solidFill>
+                      <a:srgbClr val="FFFFFF"/>
+                    </a:solidFill>
+                  </a:tcPr>
+                </a:tc>
+                <a:tc>
+                  <a:txBody>
+                    <a:bodyPr/>
+                    <a:lstStyle/>
+                    <a:p>
+                      <a:pPr indent="0" marL="0">
+                        <a:buNone/>
+                      </a:pPr>
+                      <a:r>
+                        <a:rPr lang="en-US" sz="1000" dirty="0">
+                          <a:solidFill>
+                            <a:srgbClr val="212121"/>
+                          </a:solidFill>
+                          <a:latin typeface="Calibri" pitchFamily="34" charset="0"/>
+                          <a:ea typeface="Calibri" pitchFamily="34" charset="-122"/>
+                          <a:cs typeface="Calibri" pitchFamily="34" charset="-120"/>
+                        </a:rPr>
+                        <a:t>Tool schema always in the prompt</a:t>
+                      </a:r>
+                      <a:endParaRPr lang="en-US" sz="1000" dirty="0">
+                        <a:latin typeface="Calibri" charset="0"/>
+                        <a:ea typeface="Calibri" charset="0"/>
+                        <a:cs typeface="Calibri" charset="0"/>
+                      </a:endParaRPr>
+                    </a:p>
+                  </a:txBody>
+                  <a:tcPr marL="54864" marR="54864" marT="54864" marB="54864" anchor="ctr">
+                    <a:lnL w="6350" cap="flat" cmpd="sng" algn="ctr">
+                      <a:solidFill>
+                        <a:srgbClr val="D1D5DB"/>
+                      </a:solidFill>
+                      <a:prstDash val="solid"/>
+                      <a:round/>
+                      <a:headEnd type="none" w="med" len="med"/>
+                      <a:tailEnd type="none" w="med" len="med"/>
+                    </a:lnL>
+                    <a:lnR w="6350" cap="flat" cmpd="sng" algn="ctr">
+                      <a:solidFill>
+                        <a:srgbClr val="D1D5DB"/>
+                      </a:solidFill>
+                      <a:prstDash val="solid"/>
+                      <a:round/>
+                      <a:headEnd type="none" w="med" len="med"/>
+                      <a:tailEnd type="none" w="med" len="med"/>
+                    </a:lnR>
+                    <a:lnT w="6350" cap="flat" cmpd="sng" algn="ctr">
+                      <a:solidFill>
+                        <a:srgbClr val="D1D5DB"/>
+                      </a:solidFill>
+                      <a:prstDash val="solid"/>
+                      <a:round/>
+                      <a:headEnd type="none" w="med" len="med"/>
+                      <a:tailEnd type="none" w="med" len="med"/>
+                    </a:lnT>
+                    <a:lnB w="6350" cap="flat" cmpd="sng" algn="ctr">
+                      <a:solidFill>
+                        <a:srgbClr val="D1D5DB"/>
+                      </a:solidFill>
+                      <a:prstDash val="solid"/>
+                      <a:round/>
+                      <a:headEnd type="none" w="med" len="med"/>
+                      <a:tailEnd type="none" w="med" len="med"/>
+                    </a:lnB>
+                    <a:solidFill>
+                      <a:srgbClr val="FFFFFF"/>
+                    </a:solidFill>
+                  </a:tcPr>
+                </a:tc>
+                <a:tc>
+                  <a:txBody>
+                    <a:bodyPr/>
+                    <a:lstStyle/>
+                    <a:p>
+                      <a:pPr indent="0" marL="0">
+                        <a:buNone/>
+                      </a:pPr>
+                      <a:r>
+                        <a:rPr lang="en-US" sz="1000" dirty="0">
+                          <a:solidFill>
+                            <a:srgbClr val="212121"/>
+                          </a:solidFill>
+                          <a:latin typeface="Calibri" pitchFamily="34" charset="0"/>
+                          <a:ea typeface="Calibri" pitchFamily="34" charset="-122"/>
+                          <a:cs typeface="Calibri" pitchFamily="34" charset="-120"/>
+                        </a:rPr>
+                        <a:t>Only name + description (~100 tokens) upfront; full content on demand</a:t>
+                      </a:r>
+                      <a:endParaRPr lang="en-US" sz="1000" dirty="0">
+                        <a:latin typeface="Calibri" charset="0"/>
+                        <a:ea typeface="Calibri" charset="0"/>
+                        <a:cs typeface="Calibri" charset="0"/>
+                      </a:endParaRPr>
+                    </a:p>
+                  </a:txBody>
+                  <a:tcPr marL="54864" marR="54864" marT="54864" marB="54864" anchor="ctr">
+                    <a:lnL w="6350" cap="flat" cmpd="sng" algn="ctr">
+                      <a:solidFill>
+                        <a:srgbClr val="D1D5DB"/>
+                      </a:solidFill>
+                      <a:prstDash val="solid"/>
+                      <a:round/>
+                      <a:headEnd type="none" w="med" len="med"/>
+                      <a:tailEnd type="none" w="med" len="med"/>
+                    </a:lnL>
+                    <a:lnR w="6350" cap="flat" cmpd="sng" algn="ctr">
+                      <a:solidFill>
+                        <a:srgbClr val="D1D5DB"/>
+                      </a:solidFill>
+                      <a:prstDash val="solid"/>
+                      <a:round/>
+                      <a:headEnd type="none" w="med" len="med"/>
+                      <a:tailEnd type="none" w="med" len="med"/>
+                    </a:lnR>
+                    <a:lnT w="6350" cap="flat" cmpd="sng" algn="ctr">
+                      <a:solidFill>
+                        <a:srgbClr val="D1D5DB"/>
+                      </a:solidFill>
+                      <a:prstDash val="solid"/>
+                      <a:round/>
+                      <a:headEnd type="none" w="med" len="med"/>
+                      <a:tailEnd type="none" w="med" len="med"/>
+                    </a:lnT>
+                    <a:lnB w="6350" cap="flat" cmpd="sng" algn="ctr">
+                      <a:solidFill>
+                        <a:srgbClr val="D1D5DB"/>
+                      </a:solidFill>
+                      <a:prstDash val="solid"/>
+                      <a:round/>
+                      <a:headEnd type="none" w="med" len="med"/>
+                      <a:tailEnd type="none" w="med" len="med"/>
+                    </a:lnB>
+                    <a:solidFill>
+                      <a:srgbClr val="FFFFFF"/>
+                    </a:solidFill>
+                  </a:tcPr>
+                </a:tc>
+              </a:tr>
+              <a:tr h="502920">
+                <a:tc>
+                  <a:txBody>
+                    <a:bodyPr/>
+                    <a:lstStyle/>
+                    <a:p>
+                      <a:pPr indent="0" marL="0">
+                        <a:buNone/>
+                      </a:pPr>
+                      <a:r>
+                        <a:rPr lang="en-US" sz="1000" dirty="0">
+                          <a:solidFill>
+                            <a:srgbClr val="212121"/>
+                          </a:solidFill>
+                          <a:latin typeface="Calibri" pitchFamily="34" charset="0"/>
+                          <a:ea typeface="Calibri" pitchFamily="34" charset="-122"/>
+                          <a:cs typeface="Calibri" pitchFamily="34" charset="-120"/>
+                        </a:rPr>
+                        <a:t>Portability</a:t>
+                      </a:r>
+                      <a:endParaRPr lang="en-US" sz="1000" dirty="0">
+                        <a:latin typeface="Calibri" charset="0"/>
+                        <a:ea typeface="Calibri" charset="0"/>
+                        <a:cs typeface="Calibri" charset="0"/>
+                      </a:endParaRPr>
+                    </a:p>
+                  </a:txBody>
+                  <a:tcPr marL="54864" marR="54864" marT="54864" marB="54864" anchor="ctr">
+                    <a:lnL w="6350" cap="flat" cmpd="sng" algn="ctr">
+                      <a:solidFill>
+                        <a:srgbClr val="D1D5DB"/>
+                      </a:solidFill>
+                      <a:prstDash val="solid"/>
+                      <a:round/>
+                      <a:headEnd type="none" w="med" len="med"/>
+                      <a:tailEnd type="none" w="med" len="med"/>
+                    </a:lnL>
+                    <a:lnR w="6350" cap="flat" cmpd="sng" algn="ctr">
+                      <a:solidFill>
+                        <a:srgbClr val="D1D5DB"/>
+                      </a:solidFill>
+                      <a:prstDash val="solid"/>
+                      <a:round/>
+                      <a:headEnd type="none" w="med" len="med"/>
+                      <a:tailEnd type="none" w="med" len="med"/>
+                    </a:lnR>
+                    <a:lnT w="6350" cap="flat" cmpd="sng" algn="ctr">
+                      <a:solidFill>
+                        <a:srgbClr val="D1D5DB"/>
+                      </a:solidFill>
+                      <a:prstDash val="solid"/>
+                      <a:round/>
+                      <a:headEnd type="none" w="med" len="med"/>
+                      <a:tailEnd type="none" w="med" len="med"/>
+                    </a:lnT>
+                    <a:lnB w="6350" cap="flat" cmpd="sng" algn="ctr">
+                      <a:solidFill>
+                        <a:srgbClr val="D1D5DB"/>
+                      </a:solidFill>
+                      <a:prstDash val="solid"/>
+                      <a:round/>
+                      <a:headEnd type="none" w="med" len="med"/>
+                      <a:tailEnd type="none" w="med" len="med"/>
+                    </a:lnB>
+                    <a:solidFill>
+                      <a:srgbClr val="F3F4F6"/>
+                    </a:solidFill>
+                  </a:tcPr>
+                </a:tc>
+                <a:tc>
+                  <a:txBody>
+                    <a:bodyPr/>
+                    <a:lstStyle/>
+                    <a:p>
+                      <a:pPr indent="0" marL="0">
+                        <a:buNone/>
+                      </a:pPr>
+                      <a:r>
+                        <a:rPr lang="en-US" sz="1000" dirty="0">
+                          <a:solidFill>
+                            <a:srgbClr val="212121"/>
+                          </a:solidFill>
+                          <a:latin typeface="Calibri" pitchFamily="34" charset="0"/>
+                          <a:ea typeface="Calibri" pitchFamily="34" charset="-122"/>
+                          <a:cs typeface="Calibri" pitchFamily="34" charset="-120"/>
+                        </a:rPr>
+                        <a:t>Tied to the agent that registers it</a:t>
+                      </a:r>
+                      <a:endParaRPr lang="en-US" sz="1000" dirty="0">
+                        <a:latin typeface="Calibri" charset="0"/>
+                        <a:ea typeface="Calibri" charset="0"/>
+                        <a:cs typeface="Calibri" charset="0"/>
+                      </a:endParaRPr>
+                    </a:p>
+                  </a:txBody>
+                  <a:tcPr marL="54864" marR="54864" marT="54864" marB="54864" anchor="ctr">
+                    <a:lnL w="6350" cap="flat" cmpd="sng" algn="ctr">
+                      <a:solidFill>
+                        <a:srgbClr val="D1D5DB"/>
+                      </a:solidFill>
+                      <a:prstDash val="solid"/>
+                      <a:round/>
+                      <a:headEnd type="none" w="med" len="med"/>
+                      <a:tailEnd type="none" w="med" len="med"/>
+                    </a:lnL>
+                    <a:lnR w="6350" cap="flat" cmpd="sng" algn="ctr">
+                      <a:solidFill>
+                        <a:srgbClr val="D1D5DB"/>
+                      </a:solidFill>
+                      <a:prstDash val="solid"/>
+                      <a:round/>
+                      <a:headEnd type="none" w="med" len="med"/>
+                      <a:tailEnd type="none" w="med" len="med"/>
+                    </a:lnR>
+                    <a:lnT w="6350" cap="flat" cmpd="sng" algn="ctr">
+                      <a:solidFill>
+                        <a:srgbClr val="D1D5DB"/>
+                      </a:solidFill>
+                      <a:prstDash val="solid"/>
+                      <a:round/>
+                      <a:headEnd type="none" w="med" len="med"/>
+                      <a:tailEnd type="none" w="med" len="med"/>
+                    </a:lnT>
+                    <a:lnB w="6350" cap="flat" cmpd="sng" algn="ctr">
+                      <a:solidFill>
+                        <a:srgbClr val="D1D5DB"/>
+                      </a:solidFill>
+                      <a:prstDash val="solid"/>
+                      <a:round/>
+                      <a:headEnd type="none" w="med" len="med"/>
+                      <a:tailEnd type="none" w="med" len="med"/>
+                    </a:lnB>
+                    <a:solidFill>
+                      <a:srgbClr val="F3F4F6"/>
+                    </a:solidFill>
+                  </a:tcPr>
+                </a:tc>
+                <a:tc>
+                  <a:txBody>
+                    <a:bodyPr/>
+                    <a:lstStyle/>
+                    <a:p>
+                      <a:pPr indent="0" marL="0">
+                        <a:buNone/>
+                      </a:pPr>
+                      <a:r>
+                        <a:rPr lang="en-US" sz="1000" dirty="0">
+                          <a:solidFill>
+                            <a:srgbClr val="212121"/>
+                          </a:solidFill>
+                          <a:latin typeface="Calibri" pitchFamily="34" charset="0"/>
+                          <a:ea typeface="Calibri" pitchFamily="34" charset="-122"/>
+                          <a:cs typeface="Calibri" pitchFamily="34" charset="-120"/>
+                        </a:rPr>
+                        <a:t>Self-contained package any compatible agent can discover</a:t>
+                      </a:r>
+                      <a:endParaRPr lang="en-US" sz="1000" dirty="0">
+                        <a:latin typeface="Calibri" charset="0"/>
+                        <a:ea typeface="Calibri" charset="0"/>
+                        <a:cs typeface="Calibri" charset="0"/>
+                      </a:endParaRPr>
+                    </a:p>
+                  </a:txBody>
+                  <a:tcPr marL="54864" marR="54864" marT="54864" marB="54864" anchor="ctr">
+                    <a:lnL w="6350" cap="flat" cmpd="sng" algn="ctr">
+                      <a:solidFill>
+                        <a:srgbClr val="D1D5DB"/>
+                      </a:solidFill>
+                      <a:prstDash val="solid"/>
+                      <a:round/>
+                      <a:headEnd type="none" w="med" len="med"/>
+                      <a:tailEnd type="none" w="med" len="med"/>
+                    </a:lnL>
+                    <a:lnR w="6350" cap="flat" cmpd="sng" algn="ctr">
+                      <a:solidFill>
+                        <a:srgbClr val="D1D5DB"/>
+                      </a:solidFill>
+                      <a:prstDash val="solid"/>
+                      <a:round/>
+                      <a:headEnd type="none" w="med" len="med"/>
+                      <a:tailEnd type="none" w="med" len="med"/>
+                    </a:lnR>
+                    <a:lnT w="6350" cap="flat" cmpd="sng" algn="ctr">
+                      <a:solidFill>
+                        <a:srgbClr val="D1D5DB"/>
+                      </a:solidFill>
+                      <a:prstDash val="solid"/>
+                      <a:round/>
+                      <a:headEnd type="none" w="med" len="med"/>
+                      <a:tailEnd type="none" w="med" len="med"/>
+                    </a:lnT>
+                    <a:lnB w="6350" cap="flat" cmpd="sng" algn="ctr">
+                      <a:solidFill>
+                        <a:srgbClr val="D1D5DB"/>
+                      </a:solidFill>
+                      <a:prstDash val="solid"/>
+                      <a:round/>
+                      <a:headEnd type="none" w="med" len="med"/>
+                      <a:tailEnd type="none" w="med" len="med"/>
+                    </a:lnB>
+                    <a:solidFill>
+                      <a:srgbClr val="F3F4F6"/>
+                    </a:solidFill>
+                  </a:tcPr>
+                </a:tc>
+              </a:tr>
+              <a:tr h="502920">
+                <a:tc>
+                  <a:txBody>
+                    <a:bodyPr/>
+                    <a:lstStyle/>
+                    <a:p>
+                      <a:pPr indent="0" marL="0">
+                        <a:buNone/>
+                      </a:pPr>
+                      <a:r>
+                        <a:rPr lang="en-US" sz="1000" dirty="0">
+                          <a:solidFill>
+                            <a:srgbClr val="212121"/>
+                          </a:solidFill>
+                          <a:latin typeface="Calibri" pitchFamily="34" charset="0"/>
+                          <a:ea typeface="Calibri" pitchFamily="34" charset="-122"/>
+                          <a:cs typeface="Calibri" pitchFamily="34" charset="-120"/>
+                        </a:rPr>
+                        <a:t>Best for</a:t>
+                      </a:r>
+                      <a:endParaRPr lang="en-US" sz="1000" dirty="0">
+                        <a:latin typeface="Calibri" charset="0"/>
+                        <a:ea typeface="Calibri" charset="0"/>
+                        <a:cs typeface="Calibri" charset="0"/>
+                      </a:endParaRPr>
+                    </a:p>
+                  </a:txBody>
+                  <a:tcPr marL="54864" marR="54864" marT="54864" marB="54864" anchor="ctr">
+                    <a:lnL w="6350" cap="flat" cmpd="sng" algn="ctr">
+                      <a:solidFill>
+                        <a:srgbClr val="D1D5DB"/>
+                      </a:solidFill>
+                      <a:prstDash val="solid"/>
+                      <a:round/>
+                      <a:headEnd type="none" w="med" len="med"/>
+                      <a:tailEnd type="none" w="med" len="med"/>
+                    </a:lnL>
+                    <a:lnR w="6350" cap="flat" cmpd="sng" algn="ctr">
+                      <a:solidFill>
+                        <a:srgbClr val="D1D5DB"/>
+                      </a:solidFill>
+                      <a:prstDash val="solid"/>
+                      <a:round/>
+                      <a:headEnd type="none" w="med" len="med"/>
+                      <a:tailEnd type="none" w="med" len="med"/>
+                    </a:lnR>
+                    <a:lnT w="6350" cap="flat" cmpd="sng" algn="ctr">
+                      <a:solidFill>
+                        <a:srgbClr val="D1D5DB"/>
+                      </a:solidFill>
+                      <a:prstDash val="solid"/>
+                      <a:round/>
+                      <a:headEnd type="none" w="med" len="med"/>
+                      <a:tailEnd type="none" w="med" len="med"/>
+                    </a:lnT>
+                    <a:lnB w="6350" cap="flat" cmpd="sng" algn="ctr">
+                      <a:solidFill>
+                        <a:srgbClr val="D1D5DB"/>
+                      </a:solidFill>
+                      <a:prstDash val="solid"/>
+                      <a:round/>
+                      <a:headEnd type="none" w="med" len="med"/>
+                      <a:tailEnd type="none" w="med" len="med"/>
+                    </a:lnB>
+                    <a:solidFill>
+                      <a:srgbClr val="FFFFFF"/>
+                    </a:solidFill>
+                  </a:tcPr>
+                </a:tc>
+                <a:tc>
+                  <a:txBody>
+                    <a:bodyPr/>
+                    <a:lstStyle/>
+                    <a:p>
+                      <a:pPr indent="0" marL="0">
+                        <a:buNone/>
+                      </a:pPr>
+                      <a:r>
+                        <a:rPr lang="en-US" sz="1000" dirty="0">
+                          <a:solidFill>
+                            <a:srgbClr val="212121"/>
+                          </a:solidFill>
+                          <a:latin typeface="Calibri" pitchFamily="34" charset="0"/>
+                          <a:ea typeface="Calibri" pitchFamily="34" charset="-122"/>
+                          <a:cs typeface="Calibri" pitchFamily="34" charset="-120"/>
+                        </a:rPr>
+                        <a:t>Individual actions (query a DB, send an email)</a:t>
+                      </a:r>
+                      <a:endParaRPr lang="en-US" sz="1000" dirty="0">
+                        <a:latin typeface="Calibri" charset="0"/>
+                        <a:ea typeface="Calibri" charset="0"/>
+                        <a:cs typeface="Calibri" charset="0"/>
+                      </a:endParaRPr>
+                    </a:p>
+                  </a:txBody>
+                  <a:tcPr marL="54864" marR="54864" marT="54864" marB="54864" anchor="ctr">
+                    <a:lnL w="6350" cap="flat" cmpd="sng" algn="ctr">
+                      <a:solidFill>
+                        <a:srgbClr val="D1D5DB"/>
+                      </a:solidFill>
+                      <a:prstDash val="solid"/>
+                      <a:round/>
+                      <a:headEnd type="none" w="med" len="med"/>
+                      <a:tailEnd type="none" w="med" len="med"/>
+                    </a:lnL>
+                    <a:lnR w="6350" cap="flat" cmpd="sng" algn="ctr">
+                      <a:solidFill>
+                        <a:srgbClr val="D1D5DB"/>
+                      </a:solidFill>
+                      <a:prstDash val="solid"/>
+                      <a:round/>
+                      <a:headEnd type="none" w="med" len="med"/>
+                      <a:tailEnd type="none" w="med" len="med"/>
+                    </a:lnR>
+                    <a:lnT w="6350" cap="flat" cmpd="sng" algn="ctr">
+                      <a:solidFill>
+                        <a:srgbClr val="D1D5DB"/>
+                      </a:solidFill>
+                      <a:prstDash val="solid"/>
+                      <a:round/>
+                      <a:headEnd type="none" w="med" len="med"/>
+                      <a:tailEnd type="none" w="med" len="med"/>
+                    </a:lnT>
+                    <a:lnB w="6350" cap="flat" cmpd="sng" algn="ctr">
+                      <a:solidFill>
+                        <a:srgbClr val="D1D5DB"/>
+                      </a:solidFill>
+                      <a:prstDash val="solid"/>
+                      <a:round/>
+                      <a:headEnd type="none" w="med" len="med"/>
+                      <a:tailEnd type="none" w="med" len="med"/>
+                    </a:lnB>
+                    <a:solidFill>
+                      <a:srgbClr val="FFFFFF"/>
+                    </a:solidFill>
+                  </a:tcPr>
+                </a:tc>
+                <a:tc>
+                  <a:txBody>
+                    <a:bodyPr/>
+                    <a:lstStyle/>
+                    <a:p>
+                      <a:pPr indent="0" marL="0">
+                        <a:buNone/>
+                      </a:pPr>
+                      <a:r>
+                        <a:rPr lang="en-US" sz="1000" dirty="0">
+                          <a:solidFill>
+                            <a:srgbClr val="212121"/>
+                          </a:solidFill>
+                          <a:latin typeface="Calibri" pitchFamily="34" charset="0"/>
+                          <a:ea typeface="Calibri" pitchFamily="34" charset="-122"/>
+                          <a:cs typeface="Calibri" pitchFamily="34" charset="-120"/>
+                        </a:rPr>
+                        <a:t>Domain expertise (expense policies, code review guidelines)</a:t>
+                      </a:r>
+                      <a:endParaRPr lang="en-US" sz="1000" dirty="0">
+                        <a:latin typeface="Calibri" charset="0"/>
+                        <a:ea typeface="Calibri" charset="0"/>
+                        <a:cs typeface="Calibri" charset="0"/>
+                      </a:endParaRPr>
+                    </a:p>
+                  </a:txBody>
+                  <a:tcPr marL="54864" marR="54864" marT="54864" marB="54864" anchor="ctr">
+                    <a:lnL w="6350" cap="flat" cmpd="sng" algn="ctr">
+                      <a:solidFill>
+                        <a:srgbClr val="D1D5DB"/>
+                      </a:solidFill>
+                      <a:prstDash val="solid"/>
+                      <a:round/>
+                      <a:headEnd type="none" w="med" len="med"/>
+                      <a:tailEnd type="none" w="med" len="med"/>
+                    </a:lnL>
+                    <a:lnR w="6350" cap="flat" cmpd="sng" algn="ctr">
+                      <a:solidFill>
+                        <a:srgbClr val="D1D5DB"/>
+                      </a:solidFill>
+                      <a:prstDash val="solid"/>
+                      <a:round/>
+                      <a:headEnd type="none" w="med" len="med"/>
+                      <a:tailEnd type="none" w="med" len="med"/>
+                    </a:lnR>
+                    <a:lnT w="6350" cap="flat" cmpd="sng" algn="ctr">
+                      <a:solidFill>
+                        <a:srgbClr val="D1D5DB"/>
+                      </a:solidFill>
+                      <a:prstDash val="solid"/>
+                      <a:round/>
+                      <a:headEnd type="none" w="med" len="med"/>
+                      <a:tailEnd type="none" w="med" len="med"/>
+                    </a:lnT>
+                    <a:lnB w="6350" cap="flat" cmpd="sng" algn="ctr">
+                      <a:solidFill>
+                        <a:srgbClr val="D1D5DB"/>
+                      </a:solidFill>
+                      <a:prstDash val="solid"/>
+                      <a:round/>
+                      <a:headEnd type="none" w="med" len="med"/>
+                      <a:tailEnd type="none" w="med" len="med"/>
+                    </a:lnB>
+                    <a:solidFill>
+                      <a:srgbClr val="FFFFFF"/>
+                    </a:solidFill>
+                  </a:tcPr>
+                </a:tc>
+              </a:tr>
+            </a:tbl>
+          </a:graphicData>
+        </a:graphic>
+      </p:graphicFrame>
+      <p:sp>
+        <p:nvSpPr>
+          <p:cNvPr id="7" name="Text 4"/>
+          <p:cNvSpPr/>
+          <p:nvPr/>
+        </p:nvSpPr>
+        <p:spPr>
+          <a:xfrm>
+            <a:off x="365760" y="4709160"/>
+            <a:ext cx="8412480" cy="548640"/>
+          </a:xfrm>
+          <a:prstGeom prst="rect">
+            <a:avLst/>
+          </a:prstGeom>
+          <a:noFill/>
+          <a:ln/>
+        </p:spPr>
+        <p:txBody>
+          <a:bodyPr wrap="square" rtlCol="0" anchor="ctr"/>
+          <a:lstStyle/>
+          <a:p>
+            <a:pPr indent="0" marL="0">
+              <a:buNone/>
+            </a:pPr>
+            <a:r>
+              <a:rPr lang="en-US" sz="1200" b="1" i="1" dirty="0">
+                <a:solidFill>
+                  <a:srgbClr val="1E2761"/>
+                </a:solidFill>
+                <a:latin typeface="Calibri" pitchFamily="34" charset="0"/>
+                <a:ea typeface="Calibri" pitchFamily="34" charset="-122"/>
+                <a:cs typeface="Calibri" pitchFamily="34" charset="-120"/>
+              </a:rPr>
+              <a:t>Rule of thumb: tools are verbs (search, book, validate). Skills are expertise (travel booking knowledge, expense policy knowledge). Agents use tools to act and skills to know how to act.</a:t>
+            </a:r>
+            <a:endParaRPr lang="en-US" sz="1200" dirty="0"/>
+          </a:p>
+        </p:txBody>
+      </p:sp>
+      <p:sp>
+        <p:nvSpPr>
+          <p:cNvPr id="8" name="Text 5"/>
+          <p:cNvSpPr/>
+          <p:nvPr/>
+        </p:nvSpPr>
+        <p:spPr>
+          <a:xfrm>
+            <a:off x="365760" y="5212080"/>
+            <a:ext cx="8412480" cy="201168"/>
+          </a:xfrm>
+          <a:prstGeom prst="rect">
+            <a:avLst/>
+          </a:prstGeom>
+          <a:noFill/>
+          <a:ln/>
+        </p:spPr>
+        <p:txBody>
+          <a:bodyPr wrap="square" rtlCol="0" anchor="ctr"/>
+          <a:lstStyle/>
+          <a:p>
+            <a:pPr algn="ctr" indent="0" marL="0">
+              <a:buNone/>
+            </a:pPr>
+            <a:r>
+              <a:rPr lang="en-US" sz="800" i="1" dirty="0">
+                <a:solidFill>
+                  <a:srgbClr val="6B7280"/>
+                </a:solidFill>
+                <a:latin typeface="Calibri" pitchFamily="34" charset="0"/>
+                <a:ea typeface="Calibri" pitchFamily="34" charset="-122"/>
+                <a:cs typeface="Calibri" pitchFamily="34" charset="-120"/>
+              </a:rPr>
+              <a:t>Source: Microsoft Learn · aka.ms/agent-framework/journey/adding-skills</a:t>
+            </a:r>
+            <a:endParaRPr lang="en-US" sz="800" dirty="0"/>
+          </a:p>
+        </p:txBody>
+      </p:sp>
+    </p:spTree>
+  </p:cSld>
+  <p:clrMapOvr>
+    <a:masterClrMapping/>
+  </p:clrMapOvr>
+</p:sld>
+</file>
+
+<file path=ppt/slides/slide9.xml><?xml version="1.0" encoding="utf-8"?>
+<p:sld xmlns:a="http://schemas.openxmlformats.org/drawingml/2006/main" xmlns:r="http://schemas.openxmlformats.org/officeDocument/2006/relationships" xmlns:p="http://schemas.openxmlformats.org/presentationml/2006/main">
+  <p:cSld name="Slide 9">
+    <p:bg>
+      <p:bgPr>
+        <a:solidFill>
+          <a:srgbClr val="FFFFFF"/>
+        </a:solidFill>
+      </p:bgPr>
+    </p:bg>
+    <p:spTree>
+      <p:nvGrpSpPr>
+        <p:cNvPr id="1" name=""/>
+        <p:cNvGrpSpPr/>
+        <p:nvPr/>
+      </p:nvGrpSpPr>
+      <p:grpSpPr>
+        <a:xfrm>
+          <a:off x="0" y="0"/>
+          <a:ext cx="0" cy="0"/>
+          <a:chOff x="0" y="0"/>
+          <a:chExt cx="0" cy="0"/>
+        </a:xfrm>
+      </p:grpSpPr>
+      <p:sp>
+        <p:nvSpPr>
+          <p:cNvPr id="2" name="Shape 0"/>
+          <p:cNvSpPr/>
+          <p:nvPr/>
+        </p:nvSpPr>
+        <p:spPr>
+          <a:xfrm>
+            <a:off x="0" y="0"/>
+            <a:ext cx="54864" cy="5143500"/>
+          </a:xfrm>
+          <a:prstGeom prst="rect">
+            <a:avLst/>
+          </a:prstGeom>
+          <a:solidFill>
+            <a:srgbClr val="1E2761"/>
+          </a:solidFill>
+          <a:ln/>
+        </p:spPr>
+      </p:sp>
+      <p:sp>
+        <p:nvSpPr>
+          <p:cNvPr id="3" name="Text 1"/>
+          <p:cNvSpPr/>
+          <p:nvPr/>
+        </p:nvSpPr>
+        <p:spPr>
+          <a:xfrm>
+            <a:off x="5669280" y="274320"/>
+            <a:ext cx="3291840" cy="274320"/>
+          </a:xfrm>
+          <a:prstGeom prst="rect">
+            <a:avLst/>
+          </a:prstGeom>
+          <a:noFill/>
+          <a:ln/>
+        </p:spPr>
+        <p:txBody>
+          <a:bodyPr wrap="square" lIns="0" tIns="0" rIns="0" bIns="0" rtlCol="0" anchor="ctr"/>
+          <a:lstStyle/>
+          <a:p>
+            <a:pPr algn="r" indent="0" marL="0">
+              <a:buNone/>
+            </a:pPr>
+            <a:r>
+              <a:rPr lang="en-US" sz="1000" dirty="0">
+                <a:solidFill>
+                  <a:srgbClr val="6B7280"/>
+                </a:solidFill>
+                <a:latin typeface="Calibri" pitchFamily="34" charset="0"/>
+                <a:ea typeface="Calibri" pitchFamily="34" charset="-122"/>
+                <a:cs typeface="Calibri" pitchFamily="34" charset="-120"/>
+              </a:rPr>
+              <a:t>Day 1 · Module 5</a:t>
+            </a:r>
+            <a:endParaRPr lang="en-US" sz="1000" dirty="0"/>
+          </a:p>
+        </p:txBody>
+      </p:sp>
+      <p:sp>
+        <p:nvSpPr>
+          <p:cNvPr id="4" name="Text 2"/>
+          <p:cNvSpPr/>
+          <p:nvPr/>
+        </p:nvSpPr>
+        <p:spPr>
+          <a:xfrm>
+            <a:off x="365760" y="320040"/>
+            <a:ext cx="6217920" cy="640080"/>
+          </a:xfrm>
+          <a:prstGeom prst="rect">
+            <a:avLst/>
+          </a:prstGeom>
+          <a:noFill/>
+          <a:ln/>
+        </p:spPr>
+        <p:txBody>
+          <a:bodyPr wrap="square" lIns="0" tIns="0" rIns="0" bIns="0" rtlCol="0" anchor="ctr"/>
+          <a:lstStyle/>
+          <a:p>
+            <a:pPr indent="0" marL="0">
+              <a:buNone/>
+            </a:pPr>
+            <a:r>
+              <a:rPr lang="en-US" sz="2800" b="1" dirty="0">
+                <a:solidFill>
+                  <a:srgbClr val="1E2761"/>
+                </a:solidFill>
+                <a:latin typeface="Calibri" pitchFamily="34" charset="0"/>
+                <a:ea typeface="Calibri" pitchFamily="34" charset="-122"/>
+                <a:cs typeface="Calibri" pitchFamily="34" charset="-120"/>
+              </a:rPr>
               <a:t>Where each day lives on the stack</a:t>
             </a:r>
             <a:endParaRPr lang="en-US" sz="2800" dirty="0"/>
@@ -4077,7 +5972,7 @@
       </p:sp>
       <p:graphicFrame>
         <p:nvGraphicFramePr>
-          <p:cNvPr id="9" name="Table 0"/>
+          <p:cNvPr id="10" name="Table 0"/>
           <p:cNvGraphicFramePr>
             <a:graphicFrameLocks noGrp="1"/>
           </p:cNvGraphicFramePr>
@@ -6569,260 +8464,6 @@
           </a:graphicData>
         </a:graphic>
       </p:graphicFrame>
-    </p:spTree>
-  </p:cSld>
-  <p:clrMapOvr>
-    <a:masterClrMapping/>
-  </p:clrMapOvr>
-</p:sld>
-</file>
-
-<file path=ppt/slides/slide9.xml><?xml version="1.0" encoding="utf-8"?>
-<p:sld xmlns:a="http://schemas.openxmlformats.org/drawingml/2006/main" xmlns:r="http://schemas.openxmlformats.org/officeDocument/2006/relationships" xmlns:p="http://schemas.openxmlformats.org/presentationml/2006/main">
-  <p:cSld name="Slide 9">
-    <p:bg>
-      <p:bgPr>
-        <a:solidFill>
-          <a:srgbClr val="FFFFFF"/>
-        </a:solidFill>
-      </p:bgPr>
-    </p:bg>
-    <p:spTree>
-      <p:nvGrpSpPr>
-        <p:cNvPr id="1" name=""/>
-        <p:cNvGrpSpPr/>
-        <p:nvPr/>
-      </p:nvGrpSpPr>
-      <p:grpSpPr>
-        <a:xfrm>
-          <a:off x="0" y="0"/>
-          <a:ext cx="0" cy="0"/>
-          <a:chOff x="0" y="0"/>
-          <a:chExt cx="0" cy="0"/>
-        </a:xfrm>
-      </p:grpSpPr>
-      <p:sp>
-        <p:nvSpPr>
-          <p:cNvPr id="2" name="Shape 0"/>
-          <p:cNvSpPr/>
-          <p:nvPr/>
-        </p:nvSpPr>
-        <p:spPr>
-          <a:xfrm>
-            <a:off x="0" y="0"/>
-            <a:ext cx="54864" cy="5143500"/>
-          </a:xfrm>
-          <a:prstGeom prst="rect">
-            <a:avLst/>
-          </a:prstGeom>
-          <a:solidFill>
-            <a:srgbClr val="1E2761"/>
-          </a:solidFill>
-          <a:ln/>
-        </p:spPr>
-      </p:sp>
-      <p:sp>
-        <p:nvSpPr>
-          <p:cNvPr id="3" name="Text 1"/>
-          <p:cNvSpPr/>
-          <p:nvPr/>
-        </p:nvSpPr>
-        <p:spPr>
-          <a:xfrm>
-            <a:off x="5669280" y="274320"/>
-            <a:ext cx="3291840" cy="274320"/>
-          </a:xfrm>
-          <a:prstGeom prst="rect">
-            <a:avLst/>
-          </a:prstGeom>
-          <a:noFill/>
-          <a:ln/>
-        </p:spPr>
-        <p:txBody>
-          <a:bodyPr wrap="square" lIns="0" tIns="0" rIns="0" bIns="0" rtlCol="0" anchor="ctr"/>
-          <a:lstStyle/>
-          <a:p>
-            <a:pPr algn="r" indent="0" marL="0">
-              <a:buNone/>
-            </a:pPr>
-            <a:r>
-              <a:rPr lang="en-US" sz="1000" dirty="0">
-                <a:solidFill>
-                  <a:srgbClr val="6B7280"/>
-                </a:solidFill>
-                <a:latin typeface="Calibri" pitchFamily="34" charset="0"/>
-                <a:ea typeface="Calibri" pitchFamily="34" charset="-122"/>
-                <a:cs typeface="Calibri" pitchFamily="34" charset="-120"/>
-              </a:rPr>
-              <a:t>Day 1 · Module 5</a:t>
-            </a:r>
-            <a:endParaRPr lang="en-US" sz="1000" dirty="0"/>
-          </a:p>
-        </p:txBody>
-      </p:sp>
-      <p:sp>
-        <p:nvSpPr>
-          <p:cNvPr id="4" name="Text 2"/>
-          <p:cNvSpPr/>
-          <p:nvPr/>
-        </p:nvSpPr>
-        <p:spPr>
-          <a:xfrm>
-            <a:off x="365760" y="320040"/>
-            <a:ext cx="6217920" cy="640080"/>
-          </a:xfrm>
-          <a:prstGeom prst="rect">
-            <a:avLst/>
-          </a:prstGeom>
-          <a:noFill/>
-          <a:ln/>
-        </p:spPr>
-        <p:txBody>
-          <a:bodyPr wrap="square" lIns="0" tIns="0" rIns="0" bIns="0" rtlCol="0" anchor="ctr"/>
-          <a:lstStyle/>
-          <a:p>
-            <a:pPr indent="0" marL="0">
-              <a:buNone/>
-            </a:pPr>
-            <a:r>
-              <a:rPr lang="en-US" sz="2800" b="1" dirty="0">
-                <a:solidFill>
-                  <a:srgbClr val="1E2761"/>
-                </a:solidFill>
-                <a:latin typeface="Calibri" pitchFamily="34" charset="0"/>
-                <a:ea typeface="Calibri" pitchFamily="34" charset="-122"/>
-                <a:cs typeface="Calibri" pitchFamily="34" charset="-120"/>
-              </a:rPr>
-              <a:t>Why this matters</a:t>
-            </a:r>
-            <a:endParaRPr lang="en-US" sz="2800" dirty="0"/>
-          </a:p>
-        </p:txBody>
-      </p:sp>
-      <p:sp>
-        <p:nvSpPr>
-          <p:cNvPr id="5" name="Text 3"/>
-          <p:cNvSpPr/>
-          <p:nvPr/>
-        </p:nvSpPr>
-        <p:spPr>
-          <a:xfrm>
-            <a:off x="365760" y="1097280"/>
-            <a:ext cx="8412480" cy="3749040"/>
-          </a:xfrm>
-          <a:prstGeom prst="rect">
-            <a:avLst/>
-          </a:prstGeom>
-          <a:noFill/>
-          <a:ln/>
-        </p:spPr>
-        <p:txBody>
-          <a:bodyPr wrap="square" rtlCol="0" anchor="ctr"/>
-          <a:lstStyle/>
-          <a:p>
-            <a:pPr marL="342900" indent="-342900">
-              <a:spcAft>
-                <a:spcPts val="600"/>
-              </a:spcAft>
-              <a:buSzPct val="100000"/>
-              <a:buChar char="•"/>
-            </a:pPr>
-            <a:r>
-              <a:rPr lang="en-US" sz="1500" dirty="0">
-                <a:solidFill>
-                  <a:srgbClr val="212121"/>
-                </a:solidFill>
-                <a:latin typeface="Calibri" pitchFamily="34" charset="0"/>
-                <a:ea typeface="Calibri" pitchFamily="34" charset="-122"/>
-                <a:cs typeface="Calibri" pitchFamily="34" charset="-120"/>
-              </a:rPr>
-              <a:t>Diagnose problems by layer — 'the agent isn't grounded' is a Knowledge problem, not a Model problem</a:t>
-            </a:r>
-            <a:endParaRPr lang="en-US" sz="1500" dirty="0"/>
-          </a:p>
-          <a:p>
-            <a:pPr marL="342900" indent="-342900">
-              <a:spcAft>
-                <a:spcPts val="600"/>
-              </a:spcAft>
-              <a:buSzPct val="100000"/>
-              <a:buChar char="•"/>
-            </a:pPr>
-            <a:r>
-              <a:rPr lang="en-US" sz="1500" dirty="0">
-                <a:solidFill>
-                  <a:srgbClr val="212121"/>
-                </a:solidFill>
-                <a:latin typeface="Calibri" pitchFamily="34" charset="0"/>
-                <a:ea typeface="Calibri" pitchFamily="34" charset="-122"/>
-                <a:cs typeface="Calibri" pitchFamily="34" charset="-120"/>
-              </a:rPr>
-              <a:t>Estimate cost and risk — adding an MCP server is an Actions + Ops concern, not a model concern</a:t>
-            </a:r>
-            <a:endParaRPr lang="en-US" sz="1500" dirty="0"/>
-          </a:p>
-          <a:p>
-            <a:pPr marL="342900" indent="-342900">
-              <a:spcAft>
-                <a:spcPts val="600"/>
-              </a:spcAft>
-              <a:buSzPct val="100000"/>
-              <a:buChar char="•"/>
-            </a:pPr>
-            <a:r>
-              <a:rPr lang="en-US" sz="1500" dirty="0">
-                <a:solidFill>
-                  <a:srgbClr val="212121"/>
-                </a:solidFill>
-                <a:latin typeface="Calibri" pitchFamily="34" charset="0"/>
-                <a:ea typeface="Calibri" pitchFamily="34" charset="-122"/>
-                <a:cs typeface="Calibri" pitchFamily="34" charset="-120"/>
-              </a:rPr>
-              <a:t>Communicate cleanly with stakeholders — product, ops, security all live at different layers</a:t>
-            </a:r>
-            <a:endParaRPr lang="en-US" sz="1500" dirty="0"/>
-          </a:p>
-        </p:txBody>
-      </p:sp>
-      <p:sp>
-        <p:nvSpPr>
-          <p:cNvPr id="6" name="Text 4"/>
-          <p:cNvSpPr/>
-          <p:nvPr/>
-        </p:nvSpPr>
-        <p:spPr>
-          <a:xfrm>
-            <a:off x="365760" y="4160520"/>
-            <a:ext cx="8412480" cy="365760"/>
-          </a:xfrm>
-          <a:prstGeom prst="rect">
-            <a:avLst/>
-          </a:prstGeom>
-          <a:noFill/>
-          <a:ln/>
-        </p:spPr>
-        <p:txBody>
-          <a:bodyPr wrap="square" rtlCol="0" anchor="ctr"/>
-          <a:lstStyle/>
-          <a:p>
-            <a:pPr indent="0" marL="0">
-              <a:buNone/>
-            </a:pPr>
-            <a:r>
-              <a:rPr lang="en-US" sz="1400" b="1" i="1" dirty="0">
-                <a:solidFill>
-                  <a:srgbClr val="1E2761"/>
-                </a:solidFill>
-                <a:latin typeface="Calibri" pitchFamily="34" charset="0"/>
-                <a:ea typeface="Calibri" pitchFamily="34" charset="-122"/>
-                <a:cs typeface="Calibri" pitchFamily="34" charset="-120"/>
-              </a:rPr>
-              <a:t>Bring this back to your team as a shared vocabulary.</a:t>
-            </a:r>
-            <a:endParaRPr lang="en-US" sz="1400" dirty="0"/>
-          </a:p>
-        </p:txBody>
-      </p:sp>
     </p:spTree>
   </p:cSld>
   <p:clrMapOvr>
